--- a/Mapped Curriculum Lessons/Grade 7/Lesson 21 - Character Codes/Character Codes - Slides.pptx
+++ b/Mapped Curriculum Lessons/Grade 7/Lesson 21 - Character Codes/Character Codes - Slides.pptx
@@ -2,28 +2,28 @@
 <file path=ppt/presentation.xml><?xml version="1.0" encoding="utf-8"?>
 <p:presentation xmlns:p="http://schemas.openxmlformats.org/presentationml/2006/main" embedTrueTypeFonts="1" saveSubsetFonts="0">
   <p:sldMasterIdLst>
-    <p:sldMasterId xmlns:r="http://schemas.openxmlformats.org/officeDocument/2006/relationships" id="2147483648" r:id="R257080b5bcfc4994"/>
+    <p:sldMasterId xmlns:r="http://schemas.openxmlformats.org/officeDocument/2006/relationships" id="2147483648" r:id="R153e921932c04b01"/>
   </p:sldMasterIdLst>
   <p:notesMasterIdLst>
-    <p:notesMasterId xmlns:r="http://schemas.openxmlformats.org/officeDocument/2006/relationships" r:id="R06f2f9a206be4d12"/>
+    <p:notesMasterId xmlns:r="http://schemas.openxmlformats.org/officeDocument/2006/relationships" r:id="Ra7591057794b4900"/>
   </p:notesMasterIdLst>
   <p:sldIdLst>
-    <p:sldId xmlns:r="http://schemas.openxmlformats.org/officeDocument/2006/relationships" id="256" r:id="R3823058144814f79"/>
-    <p:sldId xmlns:r="http://schemas.openxmlformats.org/officeDocument/2006/relationships" id="257" r:id="Rffa4845e99544260"/>
-    <p:sldId xmlns:r="http://schemas.openxmlformats.org/officeDocument/2006/relationships" id="258" r:id="R705b30938a1b40fd"/>
-    <p:sldId xmlns:r="http://schemas.openxmlformats.org/officeDocument/2006/relationships" id="259" r:id="R76b875256b3a405a"/>
-    <p:sldId xmlns:r="http://schemas.openxmlformats.org/officeDocument/2006/relationships" id="260" r:id="R1e5dddbbb7d74a9f"/>
-    <p:sldId xmlns:r="http://schemas.openxmlformats.org/officeDocument/2006/relationships" id="261" r:id="R011fe498ae494754"/>
-    <p:sldId xmlns:r="http://schemas.openxmlformats.org/officeDocument/2006/relationships" id="262" r:id="R644cea5ed24d4965"/>
-    <p:sldId xmlns:r="http://schemas.openxmlformats.org/officeDocument/2006/relationships" id="263" r:id="Rcfd5d23140704b8a"/>
-    <p:sldId xmlns:r="http://schemas.openxmlformats.org/officeDocument/2006/relationships" id="264" r:id="Rad7d0de11fff45db"/>
+    <p:sldId xmlns:r="http://schemas.openxmlformats.org/officeDocument/2006/relationships" id="256" r:id="Ra0f799b7f23e4e18"/>
+    <p:sldId xmlns:r="http://schemas.openxmlformats.org/officeDocument/2006/relationships" id="257" r:id="R00f4dc1121104d25"/>
+    <p:sldId xmlns:r="http://schemas.openxmlformats.org/officeDocument/2006/relationships" id="258" r:id="Rd509825a54194110"/>
+    <p:sldId xmlns:r="http://schemas.openxmlformats.org/officeDocument/2006/relationships" id="259" r:id="R564f4f959beb48a7"/>
+    <p:sldId xmlns:r="http://schemas.openxmlformats.org/officeDocument/2006/relationships" id="260" r:id="R5a7115edb3a6457b"/>
+    <p:sldId xmlns:r="http://schemas.openxmlformats.org/officeDocument/2006/relationships" id="261" r:id="Ra25049459c634750"/>
+    <p:sldId xmlns:r="http://schemas.openxmlformats.org/officeDocument/2006/relationships" id="262" r:id="R079c277392b04a6b"/>
+    <p:sldId xmlns:r="http://schemas.openxmlformats.org/officeDocument/2006/relationships" id="263" r:id="R0806f38573f14358"/>
+    <p:sldId xmlns:r="http://schemas.openxmlformats.org/officeDocument/2006/relationships" id="264" r:id="R97c9318cc77041b4"/>
   </p:sldIdLst>
   <p:sldSz cx="12192000" cy="6858000"/>
   <p:notesSz cx="6858000" cy="9144000"/>
   <p:embeddedFontLst>
     <p:embeddedFont>
       <p:font typeface="JetBrains Mono"/>
-      <p:regular xmlns:r="http://schemas.openxmlformats.org/officeDocument/2006/relationships" r:id="R20f4f597fee54d2b"/>
+      <p:regular xmlns:r="http://schemas.openxmlformats.org/officeDocument/2006/relationships" r:id="Rd7de9b3cadc14b0c"/>
     </p:embeddedFont>
   </p:embeddedFontLst>
 </p:presentation>
@@ -1071,7 +1071,7 @@
           <p:nvPr/>
         </p:nvPicPr>
         <p:blipFill rotWithShape="1">
-          <a:blip xmlns:r="http://schemas.openxmlformats.org/officeDocument/2006/relationships" xmlns:a="http://schemas.openxmlformats.org/drawingml/2006/main" r:embed="R382f963c1a8944aa"/>
+          <a:blip xmlns:r="http://schemas.openxmlformats.org/officeDocument/2006/relationships" xmlns:a="http://schemas.openxmlformats.org/drawingml/2006/main" r:embed="R4a8fbf2ac3d54af6"/>
           <a:stretch xmlns:a="http://schemas.openxmlformats.org/drawingml/2006/main"/>
         </p:blipFill>
         <p:spPr>
@@ -1451,7 +1451,7 @@
           <p:nvPr/>
         </p:nvPicPr>
         <p:blipFill rotWithShape="1">
-          <a:blip xmlns:r="http://schemas.openxmlformats.org/officeDocument/2006/relationships" xmlns:a="http://schemas.openxmlformats.org/drawingml/2006/main" r:embed="R8ecbba4a40f84b36">
+          <a:blip xmlns:r="http://schemas.openxmlformats.org/officeDocument/2006/relationships" xmlns:a="http://schemas.openxmlformats.org/drawingml/2006/main" r:embed="R914b688d6dab48fd">
             <a:alphaModFix amt="28000"/>
           </a:blip>
           <a:stretch xmlns:a="http://schemas.openxmlformats.org/drawingml/2006/main"/>
@@ -1664,7 +1664,7 @@
           <p:nvPr/>
         </p:nvPicPr>
         <p:blipFill rotWithShape="1">
-          <a:blip xmlns:r="http://schemas.openxmlformats.org/officeDocument/2006/relationships" xmlns:a="http://schemas.openxmlformats.org/drawingml/2006/main" r:embed="Rfd8a187d7aa04f05">
+          <a:blip xmlns:r="http://schemas.openxmlformats.org/officeDocument/2006/relationships" xmlns:a="http://schemas.openxmlformats.org/drawingml/2006/main" r:embed="Rab6d56c65ad94882">
             <a:alphaModFix amt="28000"/>
           </a:blip>
           <a:stretch xmlns:a="http://schemas.openxmlformats.org/drawingml/2006/main"/>
@@ -1899,7 +1899,7 @@
           <p:nvPr/>
         </p:nvPicPr>
         <p:blipFill rotWithShape="1">
-          <a:blip xmlns:r="http://schemas.openxmlformats.org/officeDocument/2006/relationships" xmlns:a="http://schemas.openxmlformats.org/drawingml/2006/main" r:embed="Rddfed1d80f134258">
+          <a:blip xmlns:r="http://schemas.openxmlformats.org/officeDocument/2006/relationships" xmlns:a="http://schemas.openxmlformats.org/drawingml/2006/main" r:embed="Rc65506ac724042b3">
             <a:alphaModFix amt="28000"/>
           </a:blip>
           <a:stretch xmlns:a="http://schemas.openxmlformats.org/drawingml/2006/main"/>
@@ -2176,7 +2176,7 @@
           <p:nvPr/>
         </p:nvPicPr>
         <p:blipFill rotWithShape="1">
-          <a:blip xmlns:r="http://schemas.openxmlformats.org/officeDocument/2006/relationships" xmlns:a="http://schemas.openxmlformats.org/drawingml/2006/main" r:embed="Rc2f4835d12734ae8">
+          <a:blip xmlns:r="http://schemas.openxmlformats.org/officeDocument/2006/relationships" xmlns:a="http://schemas.openxmlformats.org/drawingml/2006/main" r:embed="Rdd6a1978682347a5">
             <a:alphaModFix amt="28000"/>
           </a:blip>
           <a:stretch xmlns:a="http://schemas.openxmlformats.org/drawingml/2006/main"/>
@@ -2451,7 +2451,7 @@
           <p:nvPr/>
         </p:nvPicPr>
         <p:blipFill rotWithShape="1">
-          <a:blip xmlns:r="http://schemas.openxmlformats.org/officeDocument/2006/relationships" xmlns:a="http://schemas.openxmlformats.org/drawingml/2006/main" r:embed="R80fb368a5aee47d8">
+          <a:blip xmlns:r="http://schemas.openxmlformats.org/officeDocument/2006/relationships" xmlns:a="http://schemas.openxmlformats.org/drawingml/2006/main" r:embed="Rfcbf2fa6d2754fea">
             <a:alphaModFix amt="28000"/>
           </a:blip>
           <a:stretch xmlns:a="http://schemas.openxmlformats.org/drawingml/2006/main"/>
@@ -2875,7 +2875,7 @@
           <p:nvPr/>
         </p:nvPicPr>
         <p:blipFill rotWithShape="1">
-          <a:blip xmlns:r="http://schemas.openxmlformats.org/officeDocument/2006/relationships" xmlns:a="http://schemas.openxmlformats.org/drawingml/2006/main" r:embed="R16864a292da247c0">
+          <a:blip xmlns:r="http://schemas.openxmlformats.org/officeDocument/2006/relationships" xmlns:a="http://schemas.openxmlformats.org/drawingml/2006/main" r:embed="R872952148fb34cc0">
             <a:alphaModFix amt="28000"/>
           </a:blip>
           <a:stretch xmlns:a="http://schemas.openxmlformats.org/drawingml/2006/main"/>
@@ -3016,7 +3016,7 @@
           <p:nvPr/>
         </p:nvPicPr>
         <p:blipFill rotWithShape="1">
-          <a:blip xmlns:r="http://schemas.openxmlformats.org/officeDocument/2006/relationships" xmlns:a="http://schemas.openxmlformats.org/drawingml/2006/main" r:embed="R5e5d892c7df84b5d">
+          <a:blip xmlns:r="http://schemas.openxmlformats.org/officeDocument/2006/relationships" xmlns:a="http://schemas.openxmlformats.org/drawingml/2006/main" r:embed="R62b5099e89244f12">
             <a:alphaModFix amt="28000"/>
           </a:blip>
           <a:stretch xmlns:a="http://schemas.openxmlformats.org/drawingml/2006/main"/>
@@ -3130,7 +3130,7 @@
           <p:nvPr/>
         </p:nvPicPr>
         <p:blipFill rotWithShape="1">
-          <a:blip xmlns:r="http://schemas.openxmlformats.org/officeDocument/2006/relationships" xmlns:a="http://schemas.openxmlformats.org/drawingml/2006/main" r:embed="R4563fc3a11f043c5">
+          <a:blip xmlns:r="http://schemas.openxmlformats.org/officeDocument/2006/relationships" xmlns:a="http://schemas.openxmlformats.org/drawingml/2006/main" r:embed="Rfd049d0bccfe43dd">
             <a:alphaModFix amt="28000"/>
           </a:blip>
           <a:stretch xmlns:a="http://schemas.openxmlformats.org/drawingml/2006/main"/>
@@ -3457,7 +3457,7 @@
           <p:nvPr/>
         </p:nvPicPr>
         <p:blipFill rotWithShape="1">
-          <a:blip xmlns:r="http://schemas.openxmlformats.org/officeDocument/2006/relationships" xmlns:a="http://schemas.openxmlformats.org/drawingml/2006/main" r:embed="R99936dc821e645e0">
+          <a:blip xmlns:r="http://schemas.openxmlformats.org/officeDocument/2006/relationships" xmlns:a="http://schemas.openxmlformats.org/drawingml/2006/main" r:embed="Rc1ccdb41fb4b4a4c">
             <a:alphaModFix amt="28000"/>
           </a:blip>
           <a:stretch xmlns:a="http://schemas.openxmlformats.org/drawingml/2006/main"/>
@@ -3745,7 +3745,7 @@
           <p:nvPr/>
         </p:nvPicPr>
         <p:blipFill rotWithShape="1">
-          <a:blip xmlns:r="http://schemas.openxmlformats.org/officeDocument/2006/relationships" xmlns:a="http://schemas.openxmlformats.org/drawingml/2006/main" r:embed="R961389738d9c4a90">
+          <a:blip xmlns:r="http://schemas.openxmlformats.org/officeDocument/2006/relationships" xmlns:a="http://schemas.openxmlformats.org/drawingml/2006/main" r:embed="R0d95ef651997460e">
             <a:alphaModFix amt="28000"/>
           </a:blip>
           <a:stretch xmlns:a="http://schemas.openxmlformats.org/drawingml/2006/main"/>
@@ -3982,17 +3982,17 @@
   </p:cSld>
   <p:clrMap bg1="lt1" tx1="dk1" bg2="lt2" tx2="dk2" accent1="accent1" accent2="accent2" accent3="accent3" accent4="accent4" accent5="accent5" accent6="accent6" hlink="hlink" folHlink="folHlink"/>
   <p:sldLayoutIdLst>
-    <p:sldLayoutId xmlns:r="http://schemas.openxmlformats.org/officeDocument/2006/relationships" id="2147483649" r:id="Rbbeb9212cd224735"/>
-    <p:sldLayoutId xmlns:r="http://schemas.openxmlformats.org/officeDocument/2006/relationships" id="2147483650" r:id="Ra51ed8a05eb54cea"/>
-    <p:sldLayoutId xmlns:r="http://schemas.openxmlformats.org/officeDocument/2006/relationships" id="2147483651" r:id="R57f77ce5b11941d0"/>
-    <p:sldLayoutId xmlns:r="http://schemas.openxmlformats.org/officeDocument/2006/relationships" id="2147483652" r:id="R805aaee5b1fd4829"/>
-    <p:sldLayoutId xmlns:r="http://schemas.openxmlformats.org/officeDocument/2006/relationships" id="2147483653" r:id="Rb2339aea65624be9"/>
-    <p:sldLayoutId xmlns:r="http://schemas.openxmlformats.org/officeDocument/2006/relationships" id="2147483654" r:id="R4e0940e597df452c"/>
-    <p:sldLayoutId xmlns:r="http://schemas.openxmlformats.org/officeDocument/2006/relationships" id="2147483655" r:id="R1f688db99307420e"/>
-    <p:sldLayoutId xmlns:r="http://schemas.openxmlformats.org/officeDocument/2006/relationships" id="2147483656" r:id="R730f935240444d15"/>
-    <p:sldLayoutId xmlns:r="http://schemas.openxmlformats.org/officeDocument/2006/relationships" id="2147483657" r:id="R7caa365e0e18472a"/>
-    <p:sldLayoutId xmlns:r="http://schemas.openxmlformats.org/officeDocument/2006/relationships" id="2147483658" r:id="R5e87c87f4a7b4263"/>
-    <p:sldLayoutId xmlns:r="http://schemas.openxmlformats.org/officeDocument/2006/relationships" id="2147483659" r:id="R885d7e86149846f0"/>
+    <p:sldLayoutId xmlns:r="http://schemas.openxmlformats.org/officeDocument/2006/relationships" id="2147483649" r:id="R61bb220349c84217"/>
+    <p:sldLayoutId xmlns:r="http://schemas.openxmlformats.org/officeDocument/2006/relationships" id="2147483650" r:id="R1bc9a358ffc341ec"/>
+    <p:sldLayoutId xmlns:r="http://schemas.openxmlformats.org/officeDocument/2006/relationships" id="2147483651" r:id="R61e4f77f47a14c1e"/>
+    <p:sldLayoutId xmlns:r="http://schemas.openxmlformats.org/officeDocument/2006/relationships" id="2147483652" r:id="Rdc3f4d303e0b4a2f"/>
+    <p:sldLayoutId xmlns:r="http://schemas.openxmlformats.org/officeDocument/2006/relationships" id="2147483653" r:id="Rea9aa2026b0c48fb"/>
+    <p:sldLayoutId xmlns:r="http://schemas.openxmlformats.org/officeDocument/2006/relationships" id="2147483654" r:id="R68d98de5db144533"/>
+    <p:sldLayoutId xmlns:r="http://schemas.openxmlformats.org/officeDocument/2006/relationships" id="2147483655" r:id="Rb5dd87e10b3f4a38"/>
+    <p:sldLayoutId xmlns:r="http://schemas.openxmlformats.org/officeDocument/2006/relationships" id="2147483656" r:id="R8320988a82dc4e40"/>
+    <p:sldLayoutId xmlns:r="http://schemas.openxmlformats.org/officeDocument/2006/relationships" id="2147483657" r:id="Rc0ebd035ff2f4c7d"/>
+    <p:sldLayoutId xmlns:r="http://schemas.openxmlformats.org/officeDocument/2006/relationships" id="2147483658" r:id="R27e794c0e13142f4"/>
+    <p:sldLayoutId xmlns:r="http://schemas.openxmlformats.org/officeDocument/2006/relationships" id="2147483659" r:id="R0f11432d90fa4098"/>
   </p:sldLayoutIdLst>
   <p:hf hdr="0" ftr="0" dt="0"/>
   <p:txStyles>

--- a/Mapped Curriculum Lessons/Grade 7/Lesson 21 - Character Codes/Character Codes - Slides.pptx
+++ b/Mapped Curriculum Lessons/Grade 7/Lesson 21 - Character Codes/Character Codes - Slides.pptx
@@ -2,28 +2,28 @@
 <file path=ppt/presentation.xml><?xml version="1.0" encoding="utf-8"?>
 <p:presentation xmlns:p="http://schemas.openxmlformats.org/presentationml/2006/main" embedTrueTypeFonts="1" saveSubsetFonts="0">
   <p:sldMasterIdLst>
-    <p:sldMasterId xmlns:r="http://schemas.openxmlformats.org/officeDocument/2006/relationships" id="2147483648" r:id="R153e921932c04b01"/>
+    <p:sldMasterId xmlns:r="http://schemas.openxmlformats.org/officeDocument/2006/relationships" id="2147483648" r:id="R97a4316557b44b4d"/>
   </p:sldMasterIdLst>
   <p:notesMasterIdLst>
-    <p:notesMasterId xmlns:r="http://schemas.openxmlformats.org/officeDocument/2006/relationships" r:id="Ra7591057794b4900"/>
+    <p:notesMasterId xmlns:r="http://schemas.openxmlformats.org/officeDocument/2006/relationships" r:id="R739bf41b9acf44f9"/>
   </p:notesMasterIdLst>
   <p:sldIdLst>
-    <p:sldId xmlns:r="http://schemas.openxmlformats.org/officeDocument/2006/relationships" id="256" r:id="Ra0f799b7f23e4e18"/>
-    <p:sldId xmlns:r="http://schemas.openxmlformats.org/officeDocument/2006/relationships" id="257" r:id="R00f4dc1121104d25"/>
-    <p:sldId xmlns:r="http://schemas.openxmlformats.org/officeDocument/2006/relationships" id="258" r:id="Rd509825a54194110"/>
-    <p:sldId xmlns:r="http://schemas.openxmlformats.org/officeDocument/2006/relationships" id="259" r:id="R564f4f959beb48a7"/>
-    <p:sldId xmlns:r="http://schemas.openxmlformats.org/officeDocument/2006/relationships" id="260" r:id="R5a7115edb3a6457b"/>
-    <p:sldId xmlns:r="http://schemas.openxmlformats.org/officeDocument/2006/relationships" id="261" r:id="Ra25049459c634750"/>
-    <p:sldId xmlns:r="http://schemas.openxmlformats.org/officeDocument/2006/relationships" id="262" r:id="R079c277392b04a6b"/>
-    <p:sldId xmlns:r="http://schemas.openxmlformats.org/officeDocument/2006/relationships" id="263" r:id="R0806f38573f14358"/>
-    <p:sldId xmlns:r="http://schemas.openxmlformats.org/officeDocument/2006/relationships" id="264" r:id="R97c9318cc77041b4"/>
+    <p:sldId xmlns:r="http://schemas.openxmlformats.org/officeDocument/2006/relationships" id="256" r:id="R36950bee286d4a1d"/>
+    <p:sldId xmlns:r="http://schemas.openxmlformats.org/officeDocument/2006/relationships" id="257" r:id="R8c4f4398b9bd40fe"/>
+    <p:sldId xmlns:r="http://schemas.openxmlformats.org/officeDocument/2006/relationships" id="258" r:id="R7b106aa8f5a74643"/>
+    <p:sldId xmlns:r="http://schemas.openxmlformats.org/officeDocument/2006/relationships" id="259" r:id="R15bad0e4508940b0"/>
+    <p:sldId xmlns:r="http://schemas.openxmlformats.org/officeDocument/2006/relationships" id="260" r:id="Rbe23c560bf4e4aea"/>
+    <p:sldId xmlns:r="http://schemas.openxmlformats.org/officeDocument/2006/relationships" id="261" r:id="R2c0e36f9a8104f22"/>
+    <p:sldId xmlns:r="http://schemas.openxmlformats.org/officeDocument/2006/relationships" id="262" r:id="Rd024103dbdd040c3"/>
+    <p:sldId xmlns:r="http://schemas.openxmlformats.org/officeDocument/2006/relationships" id="263" r:id="R919eceb920d84660"/>
+    <p:sldId xmlns:r="http://schemas.openxmlformats.org/officeDocument/2006/relationships" id="264" r:id="R218d603ad2d74bcf"/>
   </p:sldIdLst>
   <p:sldSz cx="12192000" cy="6858000"/>
   <p:notesSz cx="6858000" cy="9144000"/>
   <p:embeddedFontLst>
     <p:embeddedFont>
       <p:font typeface="JetBrains Mono"/>
-      <p:regular xmlns:r="http://schemas.openxmlformats.org/officeDocument/2006/relationships" r:id="Rd7de9b3cadc14b0c"/>
+      <p:regular xmlns:r="http://schemas.openxmlformats.org/officeDocument/2006/relationships" r:id="R8b83e62ffe9944d0"/>
     </p:embeddedFont>
   </p:embeddedFontLst>
 </p:presentation>
@@ -1071,7 +1071,7 @@
           <p:nvPr/>
         </p:nvPicPr>
         <p:blipFill rotWithShape="1">
-          <a:blip xmlns:r="http://schemas.openxmlformats.org/officeDocument/2006/relationships" xmlns:a="http://schemas.openxmlformats.org/drawingml/2006/main" r:embed="R4a8fbf2ac3d54af6"/>
+          <a:blip xmlns:r="http://schemas.openxmlformats.org/officeDocument/2006/relationships" xmlns:a="http://schemas.openxmlformats.org/drawingml/2006/main" r:embed="R782fa3a088e84db3"/>
           <a:stretch xmlns:a="http://schemas.openxmlformats.org/drawingml/2006/main"/>
         </p:blipFill>
         <p:spPr>
@@ -1451,7 +1451,7 @@
           <p:nvPr/>
         </p:nvPicPr>
         <p:blipFill rotWithShape="1">
-          <a:blip xmlns:r="http://schemas.openxmlformats.org/officeDocument/2006/relationships" xmlns:a="http://schemas.openxmlformats.org/drawingml/2006/main" r:embed="R914b688d6dab48fd">
+          <a:blip xmlns:r="http://schemas.openxmlformats.org/officeDocument/2006/relationships" xmlns:a="http://schemas.openxmlformats.org/drawingml/2006/main" r:embed="R82bd26ff29f14f9f">
             <a:alphaModFix amt="28000"/>
           </a:blip>
           <a:stretch xmlns:a="http://schemas.openxmlformats.org/drawingml/2006/main"/>
@@ -1664,7 +1664,7 @@
           <p:nvPr/>
         </p:nvPicPr>
         <p:blipFill rotWithShape="1">
-          <a:blip xmlns:r="http://schemas.openxmlformats.org/officeDocument/2006/relationships" xmlns:a="http://schemas.openxmlformats.org/drawingml/2006/main" r:embed="Rab6d56c65ad94882">
+          <a:blip xmlns:r="http://schemas.openxmlformats.org/officeDocument/2006/relationships" xmlns:a="http://schemas.openxmlformats.org/drawingml/2006/main" r:embed="R73804813bd274c2e">
             <a:alphaModFix amt="28000"/>
           </a:blip>
           <a:stretch xmlns:a="http://schemas.openxmlformats.org/drawingml/2006/main"/>
@@ -1899,7 +1899,7 @@
           <p:nvPr/>
         </p:nvPicPr>
         <p:blipFill rotWithShape="1">
-          <a:blip xmlns:r="http://schemas.openxmlformats.org/officeDocument/2006/relationships" xmlns:a="http://schemas.openxmlformats.org/drawingml/2006/main" r:embed="Rc65506ac724042b3">
+          <a:blip xmlns:r="http://schemas.openxmlformats.org/officeDocument/2006/relationships" xmlns:a="http://schemas.openxmlformats.org/drawingml/2006/main" r:embed="Ref6a58ee813444d8">
             <a:alphaModFix amt="28000"/>
           </a:blip>
           <a:stretch xmlns:a="http://schemas.openxmlformats.org/drawingml/2006/main"/>
@@ -2176,7 +2176,7 @@
           <p:nvPr/>
         </p:nvPicPr>
         <p:blipFill rotWithShape="1">
-          <a:blip xmlns:r="http://schemas.openxmlformats.org/officeDocument/2006/relationships" xmlns:a="http://schemas.openxmlformats.org/drawingml/2006/main" r:embed="Rdd6a1978682347a5">
+          <a:blip xmlns:r="http://schemas.openxmlformats.org/officeDocument/2006/relationships" xmlns:a="http://schemas.openxmlformats.org/drawingml/2006/main" r:embed="Rc00445b57eaa429e">
             <a:alphaModFix amt="28000"/>
           </a:blip>
           <a:stretch xmlns:a="http://schemas.openxmlformats.org/drawingml/2006/main"/>
@@ -2451,7 +2451,7 @@
           <p:nvPr/>
         </p:nvPicPr>
         <p:blipFill rotWithShape="1">
-          <a:blip xmlns:r="http://schemas.openxmlformats.org/officeDocument/2006/relationships" xmlns:a="http://schemas.openxmlformats.org/drawingml/2006/main" r:embed="Rfcbf2fa6d2754fea">
+          <a:blip xmlns:r="http://schemas.openxmlformats.org/officeDocument/2006/relationships" xmlns:a="http://schemas.openxmlformats.org/drawingml/2006/main" r:embed="R31748f72c50e4469">
             <a:alphaModFix amt="28000"/>
           </a:blip>
           <a:stretch xmlns:a="http://schemas.openxmlformats.org/drawingml/2006/main"/>
@@ -2875,7 +2875,7 @@
           <p:nvPr/>
         </p:nvPicPr>
         <p:blipFill rotWithShape="1">
-          <a:blip xmlns:r="http://schemas.openxmlformats.org/officeDocument/2006/relationships" xmlns:a="http://schemas.openxmlformats.org/drawingml/2006/main" r:embed="R872952148fb34cc0">
+          <a:blip xmlns:r="http://schemas.openxmlformats.org/officeDocument/2006/relationships" xmlns:a="http://schemas.openxmlformats.org/drawingml/2006/main" r:embed="R04c22b87c8dd4980">
             <a:alphaModFix amt="28000"/>
           </a:blip>
           <a:stretch xmlns:a="http://schemas.openxmlformats.org/drawingml/2006/main"/>
@@ -3016,7 +3016,7 @@
           <p:nvPr/>
         </p:nvPicPr>
         <p:blipFill rotWithShape="1">
-          <a:blip xmlns:r="http://schemas.openxmlformats.org/officeDocument/2006/relationships" xmlns:a="http://schemas.openxmlformats.org/drawingml/2006/main" r:embed="R62b5099e89244f12">
+          <a:blip xmlns:r="http://schemas.openxmlformats.org/officeDocument/2006/relationships" xmlns:a="http://schemas.openxmlformats.org/drawingml/2006/main" r:embed="Rb7964d51bd7a44a4">
             <a:alphaModFix amt="28000"/>
           </a:blip>
           <a:stretch xmlns:a="http://schemas.openxmlformats.org/drawingml/2006/main"/>
@@ -3130,7 +3130,7 @@
           <p:nvPr/>
         </p:nvPicPr>
         <p:blipFill rotWithShape="1">
-          <a:blip xmlns:r="http://schemas.openxmlformats.org/officeDocument/2006/relationships" xmlns:a="http://schemas.openxmlformats.org/drawingml/2006/main" r:embed="Rfd049d0bccfe43dd">
+          <a:blip xmlns:r="http://schemas.openxmlformats.org/officeDocument/2006/relationships" xmlns:a="http://schemas.openxmlformats.org/drawingml/2006/main" r:embed="R973c1b4a14f445f3">
             <a:alphaModFix amt="28000"/>
           </a:blip>
           <a:stretch xmlns:a="http://schemas.openxmlformats.org/drawingml/2006/main"/>
@@ -3457,7 +3457,7 @@
           <p:nvPr/>
         </p:nvPicPr>
         <p:blipFill rotWithShape="1">
-          <a:blip xmlns:r="http://schemas.openxmlformats.org/officeDocument/2006/relationships" xmlns:a="http://schemas.openxmlformats.org/drawingml/2006/main" r:embed="Rc1ccdb41fb4b4a4c">
+          <a:blip xmlns:r="http://schemas.openxmlformats.org/officeDocument/2006/relationships" xmlns:a="http://schemas.openxmlformats.org/drawingml/2006/main" r:embed="Rf42084e7944f4927">
             <a:alphaModFix amt="28000"/>
           </a:blip>
           <a:stretch xmlns:a="http://schemas.openxmlformats.org/drawingml/2006/main"/>
@@ -3745,7 +3745,7 @@
           <p:nvPr/>
         </p:nvPicPr>
         <p:blipFill rotWithShape="1">
-          <a:blip xmlns:r="http://schemas.openxmlformats.org/officeDocument/2006/relationships" xmlns:a="http://schemas.openxmlformats.org/drawingml/2006/main" r:embed="R0d95ef651997460e">
+          <a:blip xmlns:r="http://schemas.openxmlformats.org/officeDocument/2006/relationships" xmlns:a="http://schemas.openxmlformats.org/drawingml/2006/main" r:embed="Rc6f65bb5c0f94ac3">
             <a:alphaModFix amt="28000"/>
           </a:blip>
           <a:stretch xmlns:a="http://schemas.openxmlformats.org/drawingml/2006/main"/>
@@ -3982,17 +3982,17 @@
   </p:cSld>
   <p:clrMap bg1="lt1" tx1="dk1" bg2="lt2" tx2="dk2" accent1="accent1" accent2="accent2" accent3="accent3" accent4="accent4" accent5="accent5" accent6="accent6" hlink="hlink" folHlink="folHlink"/>
   <p:sldLayoutIdLst>
-    <p:sldLayoutId xmlns:r="http://schemas.openxmlformats.org/officeDocument/2006/relationships" id="2147483649" r:id="R61bb220349c84217"/>
-    <p:sldLayoutId xmlns:r="http://schemas.openxmlformats.org/officeDocument/2006/relationships" id="2147483650" r:id="R1bc9a358ffc341ec"/>
-    <p:sldLayoutId xmlns:r="http://schemas.openxmlformats.org/officeDocument/2006/relationships" id="2147483651" r:id="R61e4f77f47a14c1e"/>
-    <p:sldLayoutId xmlns:r="http://schemas.openxmlformats.org/officeDocument/2006/relationships" id="2147483652" r:id="Rdc3f4d303e0b4a2f"/>
-    <p:sldLayoutId xmlns:r="http://schemas.openxmlformats.org/officeDocument/2006/relationships" id="2147483653" r:id="Rea9aa2026b0c48fb"/>
-    <p:sldLayoutId xmlns:r="http://schemas.openxmlformats.org/officeDocument/2006/relationships" id="2147483654" r:id="R68d98de5db144533"/>
-    <p:sldLayoutId xmlns:r="http://schemas.openxmlformats.org/officeDocument/2006/relationships" id="2147483655" r:id="Rb5dd87e10b3f4a38"/>
-    <p:sldLayoutId xmlns:r="http://schemas.openxmlformats.org/officeDocument/2006/relationships" id="2147483656" r:id="R8320988a82dc4e40"/>
-    <p:sldLayoutId xmlns:r="http://schemas.openxmlformats.org/officeDocument/2006/relationships" id="2147483657" r:id="Rc0ebd035ff2f4c7d"/>
-    <p:sldLayoutId xmlns:r="http://schemas.openxmlformats.org/officeDocument/2006/relationships" id="2147483658" r:id="R27e794c0e13142f4"/>
-    <p:sldLayoutId xmlns:r="http://schemas.openxmlformats.org/officeDocument/2006/relationships" id="2147483659" r:id="R0f11432d90fa4098"/>
+    <p:sldLayoutId xmlns:r="http://schemas.openxmlformats.org/officeDocument/2006/relationships" id="2147483649" r:id="Rf819cb1a9236491a"/>
+    <p:sldLayoutId xmlns:r="http://schemas.openxmlformats.org/officeDocument/2006/relationships" id="2147483650" r:id="Re43f465d72364fee"/>
+    <p:sldLayoutId xmlns:r="http://schemas.openxmlformats.org/officeDocument/2006/relationships" id="2147483651" r:id="R38857087b81145c5"/>
+    <p:sldLayoutId xmlns:r="http://schemas.openxmlformats.org/officeDocument/2006/relationships" id="2147483652" r:id="R4cc66142aaff44f0"/>
+    <p:sldLayoutId xmlns:r="http://schemas.openxmlformats.org/officeDocument/2006/relationships" id="2147483653" r:id="R32908759feea42ac"/>
+    <p:sldLayoutId xmlns:r="http://schemas.openxmlformats.org/officeDocument/2006/relationships" id="2147483654" r:id="Re2ab68f040194ac8"/>
+    <p:sldLayoutId xmlns:r="http://schemas.openxmlformats.org/officeDocument/2006/relationships" id="2147483655" r:id="Rad819f3c00d946ad"/>
+    <p:sldLayoutId xmlns:r="http://schemas.openxmlformats.org/officeDocument/2006/relationships" id="2147483656" r:id="R2e86594483634ff2"/>
+    <p:sldLayoutId xmlns:r="http://schemas.openxmlformats.org/officeDocument/2006/relationships" id="2147483657" r:id="R5e5da4e0c2d54566"/>
+    <p:sldLayoutId xmlns:r="http://schemas.openxmlformats.org/officeDocument/2006/relationships" id="2147483658" r:id="R696c63e182a4401a"/>
+    <p:sldLayoutId xmlns:r="http://schemas.openxmlformats.org/officeDocument/2006/relationships" id="2147483659" r:id="R3f2b65d9fe1e4966"/>
   </p:sldLayoutIdLst>
   <p:hf hdr="0" ftr="0" dt="0"/>
   <p:txStyles>
@@ -6899,7 +6899,73 @@
                 <a:ea typeface="Calibri"/>
                 <a:cs typeface="Calibri"/>
               </a:rPr>
-              <a:t>Display the previous letter by subtracting 1 from the character code. Change the input range to one lower-case letter from b to z. Input d must display c.</a:t>
+              <a:t>Change the input message so it asks for one lower-case letter from b to z. Subtract 1 from [code], pass the result to </a:t>
+            </a:r>
+            <a:r>
+              <a:rPr sz="2400" b="0">
+                <a:solidFill>
+                  <a:srgbClr val="1750EB"/>
+                </a:solidFill>
+                <a:latin typeface="JetBrains Mono"/>
+                <a:ea typeface="JetBrains Mono"/>
+                <a:cs typeface="JetBrains Mono"/>
+              </a:rPr>
+              <a:t>chr()</a:t>
+            </a:r>
+            <a:r>
+              <a:rPr sz="2400" b="0">
+                <a:solidFill>
+                  <a:srgbClr val="080808"/>
+                </a:solidFill>
+                <a:latin typeface="Calibri"/>
+                <a:ea typeface="Calibri"/>
+                <a:cs typeface="Calibri"/>
+              </a:rPr>
+              <a:t>, and store the returned character in [previous_letter] instead of [next_letter]. Test </a:t>
+            </a:r>
+            <a:r>
+              <a:rPr sz="2400" b="0">
+                <a:solidFill>
+                  <a:srgbClr val="067D17"/>
+                </a:solidFill>
+                <a:latin typeface="JetBrains Mono"/>
+                <a:ea typeface="JetBrains Mono"/>
+                <a:cs typeface="JetBrains Mono"/>
+              </a:rPr>
+              <a:t>"d"</a:t>
+            </a:r>
+            <a:r>
+              <a:rPr sz="2400" b="0">
+                <a:solidFill>
+                  <a:srgbClr val="080808"/>
+                </a:solidFill>
+                <a:latin typeface="Calibri"/>
+                <a:ea typeface="Calibri"/>
+                <a:cs typeface="Calibri"/>
+              </a:rPr>
+              <a:t>; display </a:t>
+            </a:r>
+            <a:r>
+              <a:rPr sz="2400" b="0">
+                <a:solidFill>
+                  <a:srgbClr val="067D17"/>
+                </a:solidFill>
+                <a:latin typeface="JetBrains Mono"/>
+                <a:ea typeface="JetBrains Mono"/>
+                <a:cs typeface="JetBrains Mono"/>
+              </a:rPr>
+              <a:t>"Previous letter: c"</a:t>
+            </a:r>
+            <a:r>
+              <a:rPr sz="2400" b="0">
+                <a:solidFill>
+                  <a:srgbClr val="080808"/>
+                </a:solidFill>
+                <a:latin typeface="Calibri"/>
+                <a:ea typeface="Calibri"/>
+                <a:cs typeface="Calibri"/>
+              </a:rPr>
+              <a:t>.</a:t>
             </a:r>
           </a:p>
         </p:txBody>
@@ -7479,7 +7545,73 @@
                 <a:ea typeface="Calibri"/>
                 <a:cs typeface="Calibri"/>
               </a:rPr>
-              <a:t>Ask for one lower-case letter a-w and a shift from 1 to 3. Add the shift to the character code and display the encoded letter. For c and 2, display e.</a:t>
+              <a:t>Ask for one lower-case letter between a and w and store it in [letter]. Ask for a whole number between 1 and 3 and store it in [shift]. Add [shift] to the character code, pass the result to </a:t>
+            </a:r>
+            <a:r>
+              <a:rPr sz="2400" b="0">
+                <a:solidFill>
+                  <a:srgbClr val="1750EB"/>
+                </a:solidFill>
+                <a:latin typeface="JetBrains Mono"/>
+                <a:ea typeface="JetBrains Mono"/>
+                <a:cs typeface="JetBrains Mono"/>
+              </a:rPr>
+              <a:t>chr()</a:t>
+            </a:r>
+            <a:r>
+              <a:rPr sz="2400" b="0">
+                <a:solidFill>
+                  <a:srgbClr val="080808"/>
+                </a:solidFill>
+                <a:latin typeface="Calibri"/>
+                <a:ea typeface="Calibri"/>
+                <a:cs typeface="Calibri"/>
+              </a:rPr>
+              <a:t>, and store the returned character in [encoded]. Test </a:t>
+            </a:r>
+            <a:r>
+              <a:rPr sz="2400" b="0">
+                <a:solidFill>
+                  <a:srgbClr val="067D17"/>
+                </a:solidFill>
+                <a:latin typeface="JetBrains Mono"/>
+                <a:ea typeface="JetBrains Mono"/>
+                <a:cs typeface="JetBrains Mono"/>
+              </a:rPr>
+              <a:t>"c"</a:t>
+            </a:r>
+            <a:r>
+              <a:rPr sz="2400" b="0">
+                <a:solidFill>
+                  <a:srgbClr val="080808"/>
+                </a:solidFill>
+                <a:latin typeface="Calibri"/>
+                <a:ea typeface="Calibri"/>
+                <a:cs typeface="Calibri"/>
+              </a:rPr>
+              <a:t> and 2; display </a:t>
+            </a:r>
+            <a:r>
+              <a:rPr sz="2400" b="0">
+                <a:solidFill>
+                  <a:srgbClr val="067D17"/>
+                </a:solidFill>
+                <a:latin typeface="JetBrains Mono"/>
+                <a:ea typeface="JetBrains Mono"/>
+                <a:cs typeface="JetBrains Mono"/>
+              </a:rPr>
+              <a:t>"Encoded letter: e"</a:t>
+            </a:r>
+            <a:r>
+              <a:rPr sz="2400" b="0">
+                <a:solidFill>
+                  <a:srgbClr val="080808"/>
+                </a:solidFill>
+                <a:latin typeface="Calibri"/>
+                <a:ea typeface="Calibri"/>
+                <a:cs typeface="Calibri"/>
+              </a:rPr>
+              <a:t>.</a:t>
             </a:r>
           </a:p>
         </p:txBody>
@@ -8059,7 +8191,117 @@
                 <a:ea typeface="Calibri"/>
                 <a:cs typeface="Calibri"/>
               </a:rPr>
-              <a:t>Create a three-character encoder without a loop. Ask for three lower-case letters a-y, move each code forward by 1, concatenate the three encoded characters, and display the encoded text.</a:t>
+              <a:t>Ask for three lower-case letters between a and y. Increase each character code by 1 and pass each result to </a:t>
+            </a:r>
+            <a:r>
+              <a:rPr sz="2400" b="0">
+                <a:solidFill>
+                  <a:srgbClr val="1750EB"/>
+                </a:solidFill>
+                <a:latin typeface="JetBrains Mono"/>
+                <a:ea typeface="JetBrains Mono"/>
+                <a:cs typeface="JetBrains Mono"/>
+              </a:rPr>
+              <a:t>chr()</a:t>
+            </a:r>
+            <a:r>
+              <a:rPr sz="2400" b="0">
+                <a:solidFill>
+                  <a:srgbClr val="080808"/>
+                </a:solidFill>
+                <a:latin typeface="Calibri"/>
+                <a:ea typeface="Calibri"/>
+                <a:cs typeface="Calibri"/>
+              </a:rPr>
+              <a:t>. Join the three returned characters and store the result in [encoded_text]. Test </a:t>
+            </a:r>
+            <a:r>
+              <a:rPr sz="2400" b="0">
+                <a:solidFill>
+                  <a:srgbClr val="067D17"/>
+                </a:solidFill>
+                <a:latin typeface="JetBrains Mono"/>
+                <a:ea typeface="JetBrains Mono"/>
+                <a:cs typeface="JetBrains Mono"/>
+              </a:rPr>
+              <a:t>"a"</a:t>
+            </a:r>
+            <a:r>
+              <a:rPr sz="2400" b="0">
+                <a:solidFill>
+                  <a:srgbClr val="080808"/>
+                </a:solidFill>
+                <a:latin typeface="Calibri"/>
+                <a:ea typeface="Calibri"/>
+                <a:cs typeface="Calibri"/>
+              </a:rPr>
+              <a:t>, </a:t>
+            </a:r>
+            <a:r>
+              <a:rPr sz="2400" b="0">
+                <a:solidFill>
+                  <a:srgbClr val="067D17"/>
+                </a:solidFill>
+                <a:latin typeface="JetBrains Mono"/>
+                <a:ea typeface="JetBrains Mono"/>
+                <a:cs typeface="JetBrains Mono"/>
+              </a:rPr>
+              <a:t>"b"</a:t>
+            </a:r>
+            <a:r>
+              <a:rPr sz="2400" b="0">
+                <a:solidFill>
+                  <a:srgbClr val="080808"/>
+                </a:solidFill>
+                <a:latin typeface="Calibri"/>
+                <a:ea typeface="Calibri"/>
+                <a:cs typeface="Calibri"/>
+              </a:rPr>
+              <a:t> and </a:t>
+            </a:r>
+            <a:r>
+              <a:rPr sz="2400" b="0">
+                <a:solidFill>
+                  <a:srgbClr val="067D17"/>
+                </a:solidFill>
+                <a:latin typeface="JetBrains Mono"/>
+                <a:ea typeface="JetBrains Mono"/>
+                <a:cs typeface="JetBrains Mono"/>
+              </a:rPr>
+              <a:t>"c"</a:t>
+            </a:r>
+            <a:r>
+              <a:rPr sz="2400" b="0">
+                <a:solidFill>
+                  <a:srgbClr val="080808"/>
+                </a:solidFill>
+                <a:latin typeface="Calibri"/>
+                <a:ea typeface="Calibri"/>
+                <a:cs typeface="Calibri"/>
+              </a:rPr>
+              <a:t>; display </a:t>
+            </a:r>
+            <a:r>
+              <a:rPr sz="2400" b="0">
+                <a:solidFill>
+                  <a:srgbClr val="067D17"/>
+                </a:solidFill>
+                <a:latin typeface="JetBrains Mono"/>
+                <a:ea typeface="JetBrains Mono"/>
+                <a:cs typeface="JetBrains Mono"/>
+              </a:rPr>
+              <a:t>"Encoded text: bcd"</a:t>
+            </a:r>
+            <a:r>
+              <a:rPr sz="2400" b="0">
+                <a:solidFill>
+                  <a:srgbClr val="080808"/>
+                </a:solidFill>
+                <a:latin typeface="Calibri"/>
+                <a:ea typeface="Calibri"/>
+                <a:cs typeface="Calibri"/>
+              </a:rPr>
+              <a:t>.</a:t>
             </a:r>
           </a:p>
         </p:txBody>

--- a/Mapped Curriculum Lessons/Grade 7/Lesson 21 - Character Codes/Character Codes - Slides.pptx
+++ b/Mapped Curriculum Lessons/Grade 7/Lesson 21 - Character Codes/Character Codes - Slides.pptx
@@ -2,28 +2,28 @@
 <file path=ppt/presentation.xml><?xml version="1.0" encoding="utf-8"?>
 <p:presentation xmlns:p="http://schemas.openxmlformats.org/presentationml/2006/main" embedTrueTypeFonts="1" saveSubsetFonts="0">
   <p:sldMasterIdLst>
-    <p:sldMasterId xmlns:r="http://schemas.openxmlformats.org/officeDocument/2006/relationships" id="2147483648" r:id="R97a4316557b44b4d"/>
+    <p:sldMasterId xmlns:r="http://schemas.openxmlformats.org/officeDocument/2006/relationships" id="2147483648" r:id="R276da83e1a42478b"/>
   </p:sldMasterIdLst>
   <p:notesMasterIdLst>
-    <p:notesMasterId xmlns:r="http://schemas.openxmlformats.org/officeDocument/2006/relationships" r:id="R739bf41b9acf44f9"/>
+    <p:notesMasterId xmlns:r="http://schemas.openxmlformats.org/officeDocument/2006/relationships" r:id="R9bba60031ec0490f"/>
   </p:notesMasterIdLst>
   <p:sldIdLst>
-    <p:sldId xmlns:r="http://schemas.openxmlformats.org/officeDocument/2006/relationships" id="256" r:id="R36950bee286d4a1d"/>
-    <p:sldId xmlns:r="http://schemas.openxmlformats.org/officeDocument/2006/relationships" id="257" r:id="R8c4f4398b9bd40fe"/>
-    <p:sldId xmlns:r="http://schemas.openxmlformats.org/officeDocument/2006/relationships" id="258" r:id="R7b106aa8f5a74643"/>
-    <p:sldId xmlns:r="http://schemas.openxmlformats.org/officeDocument/2006/relationships" id="259" r:id="R15bad0e4508940b0"/>
-    <p:sldId xmlns:r="http://schemas.openxmlformats.org/officeDocument/2006/relationships" id="260" r:id="Rbe23c560bf4e4aea"/>
-    <p:sldId xmlns:r="http://schemas.openxmlformats.org/officeDocument/2006/relationships" id="261" r:id="R2c0e36f9a8104f22"/>
-    <p:sldId xmlns:r="http://schemas.openxmlformats.org/officeDocument/2006/relationships" id="262" r:id="Rd024103dbdd040c3"/>
-    <p:sldId xmlns:r="http://schemas.openxmlformats.org/officeDocument/2006/relationships" id="263" r:id="R919eceb920d84660"/>
-    <p:sldId xmlns:r="http://schemas.openxmlformats.org/officeDocument/2006/relationships" id="264" r:id="R218d603ad2d74bcf"/>
+    <p:sldId xmlns:r="http://schemas.openxmlformats.org/officeDocument/2006/relationships" id="256" r:id="R15a6ad1a315347e9"/>
+    <p:sldId xmlns:r="http://schemas.openxmlformats.org/officeDocument/2006/relationships" id="257" r:id="R8a9c4f6fd89d426e"/>
+    <p:sldId xmlns:r="http://schemas.openxmlformats.org/officeDocument/2006/relationships" id="258" r:id="R45cde23dcbcf46ad"/>
+    <p:sldId xmlns:r="http://schemas.openxmlformats.org/officeDocument/2006/relationships" id="259" r:id="Rf7f6ae4cfa9643bf"/>
+    <p:sldId xmlns:r="http://schemas.openxmlformats.org/officeDocument/2006/relationships" id="260" r:id="Reb050a98226b41be"/>
+    <p:sldId xmlns:r="http://schemas.openxmlformats.org/officeDocument/2006/relationships" id="261" r:id="Rd4ab654f18074be1"/>
+    <p:sldId xmlns:r="http://schemas.openxmlformats.org/officeDocument/2006/relationships" id="262" r:id="Rebc17c65a86e434a"/>
+    <p:sldId xmlns:r="http://schemas.openxmlformats.org/officeDocument/2006/relationships" id="263" r:id="Radf1e5bc74f34038"/>
+    <p:sldId xmlns:r="http://schemas.openxmlformats.org/officeDocument/2006/relationships" id="264" r:id="R926a377d2c21431c"/>
   </p:sldIdLst>
   <p:sldSz cx="12192000" cy="6858000"/>
   <p:notesSz cx="6858000" cy="9144000"/>
   <p:embeddedFontLst>
     <p:embeddedFont>
       <p:font typeface="JetBrains Mono"/>
-      <p:regular xmlns:r="http://schemas.openxmlformats.org/officeDocument/2006/relationships" r:id="R8b83e62ffe9944d0"/>
+      <p:regular xmlns:r="http://schemas.openxmlformats.org/officeDocument/2006/relationships" r:id="Rd40507c921ef4445"/>
     </p:embeddedFont>
   </p:embeddedFontLst>
 </p:presentation>
@@ -1071,7 +1071,7 @@
           <p:nvPr/>
         </p:nvPicPr>
         <p:blipFill rotWithShape="1">
-          <a:blip xmlns:r="http://schemas.openxmlformats.org/officeDocument/2006/relationships" xmlns:a="http://schemas.openxmlformats.org/drawingml/2006/main" r:embed="R782fa3a088e84db3"/>
+          <a:blip xmlns:r="http://schemas.openxmlformats.org/officeDocument/2006/relationships" xmlns:a="http://schemas.openxmlformats.org/drawingml/2006/main" r:embed="R6df199868f324bed"/>
           <a:stretch xmlns:a="http://schemas.openxmlformats.org/drawingml/2006/main"/>
         </p:blipFill>
         <p:spPr>
@@ -1451,7 +1451,7 @@
           <p:nvPr/>
         </p:nvPicPr>
         <p:blipFill rotWithShape="1">
-          <a:blip xmlns:r="http://schemas.openxmlformats.org/officeDocument/2006/relationships" xmlns:a="http://schemas.openxmlformats.org/drawingml/2006/main" r:embed="R82bd26ff29f14f9f">
+          <a:blip xmlns:r="http://schemas.openxmlformats.org/officeDocument/2006/relationships" xmlns:a="http://schemas.openxmlformats.org/drawingml/2006/main" r:embed="R6e61d00a2d3f4fe6">
             <a:alphaModFix amt="28000"/>
           </a:blip>
           <a:stretch xmlns:a="http://schemas.openxmlformats.org/drawingml/2006/main"/>
@@ -1664,7 +1664,7 @@
           <p:nvPr/>
         </p:nvPicPr>
         <p:blipFill rotWithShape="1">
-          <a:blip xmlns:r="http://schemas.openxmlformats.org/officeDocument/2006/relationships" xmlns:a="http://schemas.openxmlformats.org/drawingml/2006/main" r:embed="R73804813bd274c2e">
+          <a:blip xmlns:r="http://schemas.openxmlformats.org/officeDocument/2006/relationships" xmlns:a="http://schemas.openxmlformats.org/drawingml/2006/main" r:embed="R9e393c9fedd04c85">
             <a:alphaModFix amt="28000"/>
           </a:blip>
           <a:stretch xmlns:a="http://schemas.openxmlformats.org/drawingml/2006/main"/>
@@ -1899,7 +1899,7 @@
           <p:nvPr/>
         </p:nvPicPr>
         <p:blipFill rotWithShape="1">
-          <a:blip xmlns:r="http://schemas.openxmlformats.org/officeDocument/2006/relationships" xmlns:a="http://schemas.openxmlformats.org/drawingml/2006/main" r:embed="Ref6a58ee813444d8">
+          <a:blip xmlns:r="http://schemas.openxmlformats.org/officeDocument/2006/relationships" xmlns:a="http://schemas.openxmlformats.org/drawingml/2006/main" r:embed="R75dbecaac4314fa3">
             <a:alphaModFix amt="28000"/>
           </a:blip>
           <a:stretch xmlns:a="http://schemas.openxmlformats.org/drawingml/2006/main"/>
@@ -2176,7 +2176,7 @@
           <p:nvPr/>
         </p:nvPicPr>
         <p:blipFill rotWithShape="1">
-          <a:blip xmlns:r="http://schemas.openxmlformats.org/officeDocument/2006/relationships" xmlns:a="http://schemas.openxmlformats.org/drawingml/2006/main" r:embed="Rc00445b57eaa429e">
+          <a:blip xmlns:r="http://schemas.openxmlformats.org/officeDocument/2006/relationships" xmlns:a="http://schemas.openxmlformats.org/drawingml/2006/main" r:embed="Re59d7f477e294720">
             <a:alphaModFix amt="28000"/>
           </a:blip>
           <a:stretch xmlns:a="http://schemas.openxmlformats.org/drawingml/2006/main"/>
@@ -2451,7 +2451,7 @@
           <p:nvPr/>
         </p:nvPicPr>
         <p:blipFill rotWithShape="1">
-          <a:blip xmlns:r="http://schemas.openxmlformats.org/officeDocument/2006/relationships" xmlns:a="http://schemas.openxmlformats.org/drawingml/2006/main" r:embed="R31748f72c50e4469">
+          <a:blip xmlns:r="http://schemas.openxmlformats.org/officeDocument/2006/relationships" xmlns:a="http://schemas.openxmlformats.org/drawingml/2006/main" r:embed="R3cf7818d54344de0">
             <a:alphaModFix amt="28000"/>
           </a:blip>
           <a:stretch xmlns:a="http://schemas.openxmlformats.org/drawingml/2006/main"/>
@@ -2875,7 +2875,7 @@
           <p:nvPr/>
         </p:nvPicPr>
         <p:blipFill rotWithShape="1">
-          <a:blip xmlns:r="http://schemas.openxmlformats.org/officeDocument/2006/relationships" xmlns:a="http://schemas.openxmlformats.org/drawingml/2006/main" r:embed="R04c22b87c8dd4980">
+          <a:blip xmlns:r="http://schemas.openxmlformats.org/officeDocument/2006/relationships" xmlns:a="http://schemas.openxmlformats.org/drawingml/2006/main" r:embed="R839e1eaec5cc4612">
             <a:alphaModFix amt="28000"/>
           </a:blip>
           <a:stretch xmlns:a="http://schemas.openxmlformats.org/drawingml/2006/main"/>
@@ -3016,7 +3016,7 @@
           <p:nvPr/>
         </p:nvPicPr>
         <p:blipFill rotWithShape="1">
-          <a:blip xmlns:r="http://schemas.openxmlformats.org/officeDocument/2006/relationships" xmlns:a="http://schemas.openxmlformats.org/drawingml/2006/main" r:embed="Rb7964d51bd7a44a4">
+          <a:blip xmlns:r="http://schemas.openxmlformats.org/officeDocument/2006/relationships" xmlns:a="http://schemas.openxmlformats.org/drawingml/2006/main" r:embed="R7f53dda33f2f4c72">
             <a:alphaModFix amt="28000"/>
           </a:blip>
           <a:stretch xmlns:a="http://schemas.openxmlformats.org/drawingml/2006/main"/>
@@ -3130,7 +3130,7 @@
           <p:nvPr/>
         </p:nvPicPr>
         <p:blipFill rotWithShape="1">
-          <a:blip xmlns:r="http://schemas.openxmlformats.org/officeDocument/2006/relationships" xmlns:a="http://schemas.openxmlformats.org/drawingml/2006/main" r:embed="R973c1b4a14f445f3">
+          <a:blip xmlns:r="http://schemas.openxmlformats.org/officeDocument/2006/relationships" xmlns:a="http://schemas.openxmlformats.org/drawingml/2006/main" r:embed="Rdf33a3542875499b">
             <a:alphaModFix amt="28000"/>
           </a:blip>
           <a:stretch xmlns:a="http://schemas.openxmlformats.org/drawingml/2006/main"/>
@@ -3457,7 +3457,7 @@
           <p:nvPr/>
         </p:nvPicPr>
         <p:blipFill rotWithShape="1">
-          <a:blip xmlns:r="http://schemas.openxmlformats.org/officeDocument/2006/relationships" xmlns:a="http://schemas.openxmlformats.org/drawingml/2006/main" r:embed="Rf42084e7944f4927">
+          <a:blip xmlns:r="http://schemas.openxmlformats.org/officeDocument/2006/relationships" xmlns:a="http://schemas.openxmlformats.org/drawingml/2006/main" r:embed="R73729cbe3e5e4d64">
             <a:alphaModFix amt="28000"/>
           </a:blip>
           <a:stretch xmlns:a="http://schemas.openxmlformats.org/drawingml/2006/main"/>
@@ -3745,7 +3745,7 @@
           <p:nvPr/>
         </p:nvPicPr>
         <p:blipFill rotWithShape="1">
-          <a:blip xmlns:r="http://schemas.openxmlformats.org/officeDocument/2006/relationships" xmlns:a="http://schemas.openxmlformats.org/drawingml/2006/main" r:embed="Rc6f65bb5c0f94ac3">
+          <a:blip xmlns:r="http://schemas.openxmlformats.org/officeDocument/2006/relationships" xmlns:a="http://schemas.openxmlformats.org/drawingml/2006/main" r:embed="R5a1b4478cdc24e11">
             <a:alphaModFix amt="28000"/>
           </a:blip>
           <a:stretch xmlns:a="http://schemas.openxmlformats.org/drawingml/2006/main"/>
@@ -3982,17 +3982,17 @@
   </p:cSld>
   <p:clrMap bg1="lt1" tx1="dk1" bg2="lt2" tx2="dk2" accent1="accent1" accent2="accent2" accent3="accent3" accent4="accent4" accent5="accent5" accent6="accent6" hlink="hlink" folHlink="folHlink"/>
   <p:sldLayoutIdLst>
-    <p:sldLayoutId xmlns:r="http://schemas.openxmlformats.org/officeDocument/2006/relationships" id="2147483649" r:id="Rf819cb1a9236491a"/>
-    <p:sldLayoutId xmlns:r="http://schemas.openxmlformats.org/officeDocument/2006/relationships" id="2147483650" r:id="Re43f465d72364fee"/>
-    <p:sldLayoutId xmlns:r="http://schemas.openxmlformats.org/officeDocument/2006/relationships" id="2147483651" r:id="R38857087b81145c5"/>
-    <p:sldLayoutId xmlns:r="http://schemas.openxmlformats.org/officeDocument/2006/relationships" id="2147483652" r:id="R4cc66142aaff44f0"/>
-    <p:sldLayoutId xmlns:r="http://schemas.openxmlformats.org/officeDocument/2006/relationships" id="2147483653" r:id="R32908759feea42ac"/>
-    <p:sldLayoutId xmlns:r="http://schemas.openxmlformats.org/officeDocument/2006/relationships" id="2147483654" r:id="Re2ab68f040194ac8"/>
-    <p:sldLayoutId xmlns:r="http://schemas.openxmlformats.org/officeDocument/2006/relationships" id="2147483655" r:id="Rad819f3c00d946ad"/>
-    <p:sldLayoutId xmlns:r="http://schemas.openxmlformats.org/officeDocument/2006/relationships" id="2147483656" r:id="R2e86594483634ff2"/>
-    <p:sldLayoutId xmlns:r="http://schemas.openxmlformats.org/officeDocument/2006/relationships" id="2147483657" r:id="R5e5da4e0c2d54566"/>
-    <p:sldLayoutId xmlns:r="http://schemas.openxmlformats.org/officeDocument/2006/relationships" id="2147483658" r:id="R696c63e182a4401a"/>
-    <p:sldLayoutId xmlns:r="http://schemas.openxmlformats.org/officeDocument/2006/relationships" id="2147483659" r:id="R3f2b65d9fe1e4966"/>
+    <p:sldLayoutId xmlns:r="http://schemas.openxmlformats.org/officeDocument/2006/relationships" id="2147483649" r:id="R9ba4e25cb3114ce0"/>
+    <p:sldLayoutId xmlns:r="http://schemas.openxmlformats.org/officeDocument/2006/relationships" id="2147483650" r:id="Rab52be1ee50a476c"/>
+    <p:sldLayoutId xmlns:r="http://schemas.openxmlformats.org/officeDocument/2006/relationships" id="2147483651" r:id="Rf4e8743b3a824237"/>
+    <p:sldLayoutId xmlns:r="http://schemas.openxmlformats.org/officeDocument/2006/relationships" id="2147483652" r:id="R325b8f9ab8964745"/>
+    <p:sldLayoutId xmlns:r="http://schemas.openxmlformats.org/officeDocument/2006/relationships" id="2147483653" r:id="Rc80427e0356940e1"/>
+    <p:sldLayoutId xmlns:r="http://schemas.openxmlformats.org/officeDocument/2006/relationships" id="2147483654" r:id="Raff72ad1f3744284"/>
+    <p:sldLayoutId xmlns:r="http://schemas.openxmlformats.org/officeDocument/2006/relationships" id="2147483655" r:id="R1472fbb9496c41c0"/>
+    <p:sldLayoutId xmlns:r="http://schemas.openxmlformats.org/officeDocument/2006/relationships" id="2147483656" r:id="R87f580d7c9fc4c4b"/>
+    <p:sldLayoutId xmlns:r="http://schemas.openxmlformats.org/officeDocument/2006/relationships" id="2147483657" r:id="Rd77e39dc4f164230"/>
+    <p:sldLayoutId xmlns:r="http://schemas.openxmlformats.org/officeDocument/2006/relationships" id="2147483658" r:id="R8aa00a34e1604d57"/>
+    <p:sldLayoutId xmlns:r="http://schemas.openxmlformats.org/officeDocument/2006/relationships" id="2147483659" r:id="R0c3e46779b6d4420"/>
   </p:sldLayoutIdLst>
   <p:hf hdr="0" ftr="0" dt="0"/>
   <p:txStyles>
@@ -6899,18 +6899,21 @@
                 <a:ea typeface="Calibri"/>
                 <a:cs typeface="Calibri"/>
               </a:rPr>
-              <a:t>Change the input message so it asks for one lower-case letter from b to z. Subtract 1 from [code], pass the result to </a:t>
-            </a:r>
-            <a:r>
-              <a:rPr sz="2400" b="0">
-                <a:solidFill>
-                  <a:srgbClr val="1750EB"/>
-                </a:solidFill>
-                <a:latin typeface="JetBrains Mono"/>
-                <a:ea typeface="JetBrains Mono"/>
-                <a:cs typeface="JetBrains Mono"/>
-              </a:rPr>
-              <a:t>chr()</a:t>
+              <a:t>Change the example so it asks for a lowercase letter from b to z and finds the letter before it. Subtract 1 from </a:t>
+            </a:r>
+            <a:r>
+              <a:rPr sz="2050" b="0">
+                <a:solidFill>
+                  <a:srgbClr val="6A1B9A"/>
+                </a:solidFill>
+                <a:highlight>
+                  <a:srgbClr val="ECEAF4"/>
+                </a:highlight>
+                <a:latin typeface="JetBrains Mono"/>
+                <a:ea typeface="JetBrains Mono"/>
+                <a:cs typeface="JetBrains Mono"/>
+              </a:rPr>
+              <a:t> code </a:t>
             </a:r>
             <a:r>
               <a:rPr sz="2400" b="0">
@@ -6921,18 +6924,18 @@
                 <a:ea typeface="Calibri"/>
                 <a:cs typeface="Calibri"/>
               </a:rPr>
-              <a:t>, and store the returned character in [previous_letter] instead of [next_letter]. Test </a:t>
-            </a:r>
-            <a:r>
-              <a:rPr sz="2400" b="0">
-                <a:solidFill>
-                  <a:srgbClr val="067D17"/>
-                </a:solidFill>
-                <a:latin typeface="JetBrains Mono"/>
-                <a:ea typeface="JetBrains Mono"/>
-                <a:cs typeface="JetBrains Mono"/>
-              </a:rPr>
-              <a:t>"d"</a:t>
+              <a:t>, use </a:t>
+            </a:r>
+            <a:r>
+              <a:rPr sz="2050" b="0">
+                <a:solidFill>
+                  <a:srgbClr val="1750EB"/>
+                </a:solidFill>
+                <a:latin typeface="JetBrains Mono"/>
+                <a:ea typeface="JetBrains Mono"/>
+                <a:cs typeface="JetBrains Mono"/>
+              </a:rPr>
+              <a:t>chr()</a:t>
             </a:r>
             <a:r>
               <a:rPr sz="2400" b="0">
@@ -6943,10 +6946,79 @@
                 <a:ea typeface="Calibri"/>
                 <a:cs typeface="Calibri"/>
               </a:rPr>
-              <a:t>; display </a:t>
+              <a:t> to store the result in </a:t>
+            </a:r>
+            <a:r>
+              <a:rPr sz="2050" b="0">
+                <a:solidFill>
+                  <a:srgbClr val="6A1B9A"/>
+                </a:solidFill>
+                <a:highlight>
+                  <a:srgbClr val="ECEAF4"/>
+                </a:highlight>
+                <a:latin typeface="JetBrains Mono"/>
+                <a:ea typeface="JetBrains Mono"/>
+                <a:cs typeface="JetBrains Mono"/>
+              </a:rPr>
+              <a:t> previous_letter </a:t>
             </a:r>
             <a:r>
               <a:rPr sz="2400" b="0">
+                <a:solidFill>
+                  <a:srgbClr val="080808"/>
+                </a:solidFill>
+                <a:latin typeface="Calibri"/>
+                <a:ea typeface="Calibri"/>
+                <a:cs typeface="Calibri"/>
+              </a:rPr>
+              <a:t>, and display it after </a:t>
+            </a:r>
+            <a:r>
+              <a:rPr sz="2050" b="0">
+                <a:solidFill>
+                  <a:srgbClr val="067D17"/>
+                </a:solidFill>
+                <a:latin typeface="JetBrains Mono"/>
+                <a:ea typeface="JetBrains Mono"/>
+                <a:cs typeface="JetBrains Mono"/>
+              </a:rPr>
+              <a:t>"Previous letter:"</a:t>
+            </a:r>
+            <a:r>
+              <a:rPr sz="2400" b="0">
+                <a:solidFill>
+                  <a:srgbClr val="080808"/>
+                </a:solidFill>
+                <a:latin typeface="Calibri"/>
+                <a:ea typeface="Calibri"/>
+                <a:cs typeface="Calibri"/>
+              </a:rPr>
+              <a:t>. For example, </a:t>
+            </a:r>
+            <a:r>
+              <a:rPr sz="2050" b="0">
+                <a:solidFill>
+                  <a:srgbClr val="067D17"/>
+                </a:solidFill>
+                <a:latin typeface="JetBrains Mono"/>
+                <a:ea typeface="JetBrains Mono"/>
+                <a:cs typeface="JetBrains Mono"/>
+              </a:rPr>
+              <a:t>"d"</a:t>
+            </a:r>
+            <a:r>
+              <a:rPr sz="2400" b="0">
+                <a:solidFill>
+                  <a:srgbClr val="080808"/>
+                </a:solidFill>
+                <a:latin typeface="Calibri"/>
+                <a:ea typeface="Calibri"/>
+                <a:cs typeface="Calibri"/>
+              </a:rPr>
+              <a:t> displays </a:t>
+            </a:r>
+            <a:r>
+              <a:rPr sz="2050" b="0">
                 <a:solidFill>
                   <a:srgbClr val="067D17"/>
                 </a:solidFill>
@@ -7545,18 +7617,21 @@
                 <a:ea typeface="Calibri"/>
                 <a:cs typeface="Calibri"/>
               </a:rPr>
-              <a:t>Ask for one lower-case letter between a and w and store it in [letter]. Ask for a whole number between 1 and 3 and store it in [shift]. Add [shift] to the character code, pass the result to </a:t>
-            </a:r>
-            <a:r>
-              <a:rPr sz="2400" b="0">
-                <a:solidFill>
-                  <a:srgbClr val="1750EB"/>
-                </a:solidFill>
-                <a:latin typeface="JetBrains Mono"/>
-                <a:ea typeface="JetBrains Mono"/>
-                <a:cs typeface="JetBrains Mono"/>
-              </a:rPr>
-              <a:t>chr()</a:t>
+              <a:t>Change the example so it also asks for a whole-number </a:t>
+            </a:r>
+            <a:r>
+              <a:rPr sz="2050" b="0">
+                <a:solidFill>
+                  <a:srgbClr val="6A1B9A"/>
+                </a:solidFill>
+                <a:highlight>
+                  <a:srgbClr val="ECEAF4"/>
+                </a:highlight>
+                <a:latin typeface="JetBrains Mono"/>
+                <a:ea typeface="JetBrains Mono"/>
+                <a:cs typeface="JetBrains Mono"/>
+              </a:rPr>
+              <a:t> shift </a:t>
             </a:r>
             <a:r>
               <a:rPr sz="2400" b="0">
@@ -7567,18 +7642,18 @@
                 <a:ea typeface="Calibri"/>
                 <a:cs typeface="Calibri"/>
               </a:rPr>
-              <a:t>, and store the returned character in [encoded]. Test </a:t>
-            </a:r>
-            <a:r>
-              <a:rPr sz="2400" b="0">
-                <a:solidFill>
-                  <a:srgbClr val="067D17"/>
-                </a:solidFill>
-                <a:latin typeface="JetBrains Mono"/>
-                <a:ea typeface="JetBrains Mono"/>
-                <a:cs typeface="JetBrains Mono"/>
-              </a:rPr>
-              <a:t>"c"</a:t>
+              <a:t> from 1 to 3. Use </a:t>
+            </a:r>
+            <a:r>
+              <a:rPr sz="2050" b="0">
+                <a:solidFill>
+                  <a:srgbClr val="1750EB"/>
+                </a:solidFill>
+                <a:latin typeface="JetBrains Mono"/>
+                <a:ea typeface="JetBrains Mono"/>
+                <a:cs typeface="JetBrains Mono"/>
+              </a:rPr>
+              <a:t>ord()</a:t>
             </a:r>
             <a:r>
               <a:rPr sz="2400" b="0">
@@ -7589,10 +7664,101 @@
                 <a:ea typeface="Calibri"/>
                 <a:cs typeface="Calibri"/>
               </a:rPr>
-              <a:t> and 2; display </a:t>
+              <a:t>, add </a:t>
+            </a:r>
+            <a:r>
+              <a:rPr sz="2050" b="0">
+                <a:solidFill>
+                  <a:srgbClr val="6A1B9A"/>
+                </a:solidFill>
+                <a:highlight>
+                  <a:srgbClr val="ECEAF4"/>
+                </a:highlight>
+                <a:latin typeface="JetBrains Mono"/>
+                <a:ea typeface="JetBrains Mono"/>
+                <a:cs typeface="JetBrains Mono"/>
+              </a:rPr>
+              <a:t> shift </a:t>
             </a:r>
             <a:r>
               <a:rPr sz="2400" b="0">
+                <a:solidFill>
+                  <a:srgbClr val="080808"/>
+                </a:solidFill>
+                <a:latin typeface="Calibri"/>
+                <a:ea typeface="Calibri"/>
+                <a:cs typeface="Calibri"/>
+              </a:rPr>
+              <a:t>, then use </a:t>
+            </a:r>
+            <a:r>
+              <a:rPr sz="2050" b="0">
+                <a:solidFill>
+                  <a:srgbClr val="1750EB"/>
+                </a:solidFill>
+                <a:latin typeface="JetBrains Mono"/>
+                <a:ea typeface="JetBrains Mono"/>
+                <a:cs typeface="JetBrains Mono"/>
+              </a:rPr>
+              <a:t>chr()</a:t>
+            </a:r>
+            <a:r>
+              <a:rPr sz="2400" b="0">
+                <a:solidFill>
+                  <a:srgbClr val="080808"/>
+                </a:solidFill>
+                <a:latin typeface="Calibri"/>
+                <a:ea typeface="Calibri"/>
+                <a:cs typeface="Calibri"/>
+              </a:rPr>
+              <a:t> to get the new letter. Display it after </a:t>
+            </a:r>
+            <a:r>
+              <a:rPr sz="2050" b="0">
+                <a:solidFill>
+                  <a:srgbClr val="067D17"/>
+                </a:solidFill>
+                <a:latin typeface="JetBrains Mono"/>
+                <a:ea typeface="JetBrains Mono"/>
+                <a:cs typeface="JetBrains Mono"/>
+              </a:rPr>
+              <a:t>"Encoded letter:"</a:t>
+            </a:r>
+            <a:r>
+              <a:rPr sz="2400" b="0">
+                <a:solidFill>
+                  <a:srgbClr val="080808"/>
+                </a:solidFill>
+                <a:latin typeface="Calibri"/>
+                <a:ea typeface="Calibri"/>
+                <a:cs typeface="Calibri"/>
+              </a:rPr>
+              <a:t>. For example, </a:t>
+            </a:r>
+            <a:r>
+              <a:rPr sz="2050" b="0">
+                <a:solidFill>
+                  <a:srgbClr val="067D17"/>
+                </a:solidFill>
+                <a:latin typeface="JetBrains Mono"/>
+                <a:ea typeface="JetBrains Mono"/>
+                <a:cs typeface="JetBrains Mono"/>
+              </a:rPr>
+              <a:t>"c"</a:t>
+            </a:r>
+            <a:r>
+              <a:rPr sz="2400" b="0">
+                <a:solidFill>
+                  <a:srgbClr val="080808"/>
+                </a:solidFill>
+                <a:latin typeface="Calibri"/>
+                <a:ea typeface="Calibri"/>
+                <a:cs typeface="Calibri"/>
+              </a:rPr>
+              <a:t> and 2 display </a:t>
+            </a:r>
+            <a:r>
+              <a:rPr sz="2050" b="0">
                 <a:solidFill>
                   <a:srgbClr val="067D17"/>
                 </a:solidFill>
@@ -8191,10 +8357,10 @@
                 <a:ea typeface="Calibri"/>
                 <a:cs typeface="Calibri"/>
               </a:rPr>
-              <a:t>Ask for three lower-case letters between a and y. Increase each character code by 1 and pass each result to </a:t>
-            </a:r>
-            <a:r>
-              <a:rPr sz="2400" b="0">
+              <a:t>Create a three-letter encoder. Ask for three lowercase letters from a to y, one at a time. Use </a:t>
+            </a:r>
+            <a:r>
+              <a:rPr sz="2050" b="0">
                 <a:solidFill>
                   <a:srgbClr val="1750EB"/>
                 </a:solidFill>
@@ -8202,7 +8368,7 @@
                 <a:ea typeface="JetBrains Mono"/>
                 <a:cs typeface="JetBrains Mono"/>
               </a:rPr>
-              <a:t>chr()</a:t>
+              <a:t>ord()</a:t>
             </a:r>
             <a:r>
               <a:rPr sz="2400" b="0">
@@ -8213,18 +8379,18 @@
                 <a:ea typeface="Calibri"/>
                 <a:cs typeface="Calibri"/>
               </a:rPr>
-              <a:t>. Join the three returned characters and store the result in [encoded_text]. Test </a:t>
-            </a:r>
-            <a:r>
-              <a:rPr sz="2400" b="0">
-                <a:solidFill>
-                  <a:srgbClr val="067D17"/>
-                </a:solidFill>
-                <a:latin typeface="JetBrains Mono"/>
-                <a:ea typeface="JetBrains Mono"/>
-                <a:cs typeface="JetBrains Mono"/>
-              </a:rPr>
-              <a:t>"a"</a:t>
+              <a:t> and </a:t>
+            </a:r>
+            <a:r>
+              <a:rPr sz="2050" b="0">
+                <a:solidFill>
+                  <a:srgbClr val="1750EB"/>
+                </a:solidFill>
+                <a:latin typeface="JetBrains Mono"/>
+                <a:ea typeface="JetBrains Mono"/>
+                <a:cs typeface="JetBrains Mono"/>
+              </a:rPr>
+              <a:t>chr()</a:t>
             </a:r>
             <a:r>
               <a:rPr sz="2400" b="0">
@@ -8235,10 +8401,10 @@
                 <a:ea typeface="Calibri"/>
                 <a:cs typeface="Calibri"/>
               </a:rPr>
-              <a:t>, </a:t>
-            </a:r>
-            <a:r>
-              <a:rPr sz="2400" b="0">
+              <a:t> to move each letter forward by 1, then join the new letters and display them after </a:t>
+            </a:r>
+            <a:r>
+              <a:rPr sz="2050" b="0">
                 <a:solidFill>
                   <a:srgbClr val="067D17"/>
                 </a:solidFill>
@@ -8246,7 +8412,7 @@
                 <a:ea typeface="JetBrains Mono"/>
                 <a:cs typeface="JetBrains Mono"/>
               </a:rPr>
-              <a:t>"b"</a:t>
+              <a:t>"Encoded text:"</a:t>
             </a:r>
             <a:r>
               <a:rPr sz="2400" b="0">
@@ -8257,10 +8423,10 @@
                 <a:ea typeface="Calibri"/>
                 <a:cs typeface="Calibri"/>
               </a:rPr>
-              <a:t> and </a:t>
-            </a:r>
-            <a:r>
-              <a:rPr sz="2400" b="0">
+              <a:t>. For example, </a:t>
+            </a:r>
+            <a:r>
+              <a:rPr sz="2050" b="0">
                 <a:solidFill>
                   <a:srgbClr val="067D17"/>
                 </a:solidFill>
@@ -8279,18 +8445,62 @@
                 <a:ea typeface="Calibri"/>
                 <a:cs typeface="Calibri"/>
               </a:rPr>
-              <a:t>; display </a:t>
+              <a:t>, </a:t>
+            </a:r>
+            <a:r>
+              <a:rPr sz="2050" b="0">
+                <a:solidFill>
+                  <a:srgbClr val="067D17"/>
+                </a:solidFill>
+                <a:latin typeface="JetBrains Mono"/>
+                <a:ea typeface="JetBrains Mono"/>
+                <a:cs typeface="JetBrains Mono"/>
+              </a:rPr>
+              <a:t>"a"</a:t>
             </a:r>
             <a:r>
               <a:rPr sz="2400" b="0">
                 <a:solidFill>
+                  <a:srgbClr val="080808"/>
+                </a:solidFill>
+                <a:latin typeface="Calibri"/>
+                <a:ea typeface="Calibri"/>
+                <a:cs typeface="Calibri"/>
+              </a:rPr>
+              <a:t> and </a:t>
+            </a:r>
+            <a:r>
+              <a:rPr sz="2050" b="0">
+                <a:solidFill>
                   <a:srgbClr val="067D17"/>
                 </a:solidFill>
                 <a:latin typeface="JetBrains Mono"/>
                 <a:ea typeface="JetBrains Mono"/>
                 <a:cs typeface="JetBrains Mono"/>
               </a:rPr>
-              <a:t>"Encoded text: bcd"</a:t>
+              <a:t>"t"</a:t>
+            </a:r>
+            <a:r>
+              <a:rPr sz="2400" b="0">
+                <a:solidFill>
+                  <a:srgbClr val="080808"/>
+                </a:solidFill>
+                <a:latin typeface="Calibri"/>
+                <a:ea typeface="Calibri"/>
+                <a:cs typeface="Calibri"/>
+              </a:rPr>
+              <a:t> display </a:t>
+            </a:r>
+            <a:r>
+              <a:rPr sz="2050" b="0">
+                <a:solidFill>
+                  <a:srgbClr val="067D17"/>
+                </a:solidFill>
+                <a:latin typeface="JetBrains Mono"/>
+                <a:ea typeface="JetBrains Mono"/>
+                <a:cs typeface="JetBrains Mono"/>
+              </a:rPr>
+              <a:t>"Encoded text: dbu"</a:t>
             </a:r>
             <a:r>
               <a:rPr sz="2400" b="0">

--- a/Mapped Curriculum Lessons/Grade 7/Lesson 21 - Character Codes/Character Codes - Slides.pptx
+++ b/Mapped Curriculum Lessons/Grade 7/Lesson 21 - Character Codes/Character Codes - Slides.pptx
@@ -2,28 +2,28 @@
 <file path=ppt/presentation.xml><?xml version="1.0" encoding="utf-8"?>
 <p:presentation xmlns:p="http://schemas.openxmlformats.org/presentationml/2006/main" embedTrueTypeFonts="1" saveSubsetFonts="0">
   <p:sldMasterIdLst>
-    <p:sldMasterId xmlns:r="http://schemas.openxmlformats.org/officeDocument/2006/relationships" id="2147483648" r:id="R276da83e1a42478b"/>
+    <p:sldMasterId xmlns:r="http://schemas.openxmlformats.org/officeDocument/2006/relationships" id="2147483648" r:id="R54a15b30b13a4ab0"/>
   </p:sldMasterIdLst>
   <p:notesMasterIdLst>
-    <p:notesMasterId xmlns:r="http://schemas.openxmlformats.org/officeDocument/2006/relationships" r:id="R9bba60031ec0490f"/>
+    <p:notesMasterId xmlns:r="http://schemas.openxmlformats.org/officeDocument/2006/relationships" r:id="R35de08002b374793"/>
   </p:notesMasterIdLst>
   <p:sldIdLst>
-    <p:sldId xmlns:r="http://schemas.openxmlformats.org/officeDocument/2006/relationships" id="256" r:id="R15a6ad1a315347e9"/>
-    <p:sldId xmlns:r="http://schemas.openxmlformats.org/officeDocument/2006/relationships" id="257" r:id="R8a9c4f6fd89d426e"/>
-    <p:sldId xmlns:r="http://schemas.openxmlformats.org/officeDocument/2006/relationships" id="258" r:id="R45cde23dcbcf46ad"/>
-    <p:sldId xmlns:r="http://schemas.openxmlformats.org/officeDocument/2006/relationships" id="259" r:id="Rf7f6ae4cfa9643bf"/>
-    <p:sldId xmlns:r="http://schemas.openxmlformats.org/officeDocument/2006/relationships" id="260" r:id="Reb050a98226b41be"/>
-    <p:sldId xmlns:r="http://schemas.openxmlformats.org/officeDocument/2006/relationships" id="261" r:id="Rd4ab654f18074be1"/>
-    <p:sldId xmlns:r="http://schemas.openxmlformats.org/officeDocument/2006/relationships" id="262" r:id="Rebc17c65a86e434a"/>
-    <p:sldId xmlns:r="http://schemas.openxmlformats.org/officeDocument/2006/relationships" id="263" r:id="Radf1e5bc74f34038"/>
-    <p:sldId xmlns:r="http://schemas.openxmlformats.org/officeDocument/2006/relationships" id="264" r:id="R926a377d2c21431c"/>
+    <p:sldId xmlns:r="http://schemas.openxmlformats.org/officeDocument/2006/relationships" id="256" r:id="R7c2713ce76304ff1"/>
+    <p:sldId xmlns:r="http://schemas.openxmlformats.org/officeDocument/2006/relationships" id="257" r:id="R4a591440d18b4069"/>
+    <p:sldId xmlns:r="http://schemas.openxmlformats.org/officeDocument/2006/relationships" id="258" r:id="R092579f1122d4633"/>
+    <p:sldId xmlns:r="http://schemas.openxmlformats.org/officeDocument/2006/relationships" id="259" r:id="Rb4ec6ef7b29b4753"/>
+    <p:sldId xmlns:r="http://schemas.openxmlformats.org/officeDocument/2006/relationships" id="260" r:id="Rb8fe7b4907744781"/>
+    <p:sldId xmlns:r="http://schemas.openxmlformats.org/officeDocument/2006/relationships" id="261" r:id="R1f81d3de950e40f5"/>
+    <p:sldId xmlns:r="http://schemas.openxmlformats.org/officeDocument/2006/relationships" id="262" r:id="Rdec5dcc9b9874753"/>
+    <p:sldId xmlns:r="http://schemas.openxmlformats.org/officeDocument/2006/relationships" id="263" r:id="Rd68e6ad0ceb3462d"/>
+    <p:sldId xmlns:r="http://schemas.openxmlformats.org/officeDocument/2006/relationships" id="264" r:id="R2df1421780a94540"/>
   </p:sldIdLst>
   <p:sldSz cx="12192000" cy="6858000"/>
   <p:notesSz cx="6858000" cy="9144000"/>
   <p:embeddedFontLst>
     <p:embeddedFont>
       <p:font typeface="JetBrains Mono"/>
-      <p:regular xmlns:r="http://schemas.openxmlformats.org/officeDocument/2006/relationships" r:id="Rd40507c921ef4445"/>
+      <p:regular xmlns:r="http://schemas.openxmlformats.org/officeDocument/2006/relationships" r:id="Rbf4f517095d94679"/>
     </p:embeddedFont>
   </p:embeddedFontLst>
 </p:presentation>
@@ -1071,7 +1071,7 @@
           <p:nvPr/>
         </p:nvPicPr>
         <p:blipFill rotWithShape="1">
-          <a:blip xmlns:r="http://schemas.openxmlformats.org/officeDocument/2006/relationships" xmlns:a="http://schemas.openxmlformats.org/drawingml/2006/main" r:embed="R6df199868f324bed"/>
+          <a:blip xmlns:r="http://schemas.openxmlformats.org/officeDocument/2006/relationships" xmlns:a="http://schemas.openxmlformats.org/drawingml/2006/main" r:embed="R529def1b1d3341b4"/>
           <a:stretch xmlns:a="http://schemas.openxmlformats.org/drawingml/2006/main"/>
         </p:blipFill>
         <p:spPr>
@@ -1451,7 +1451,7 @@
           <p:nvPr/>
         </p:nvPicPr>
         <p:blipFill rotWithShape="1">
-          <a:blip xmlns:r="http://schemas.openxmlformats.org/officeDocument/2006/relationships" xmlns:a="http://schemas.openxmlformats.org/drawingml/2006/main" r:embed="R6e61d00a2d3f4fe6">
+          <a:blip xmlns:r="http://schemas.openxmlformats.org/officeDocument/2006/relationships" xmlns:a="http://schemas.openxmlformats.org/drawingml/2006/main" r:embed="Re38ffa72e1d84d08">
             <a:alphaModFix amt="28000"/>
           </a:blip>
           <a:stretch xmlns:a="http://schemas.openxmlformats.org/drawingml/2006/main"/>
@@ -1664,7 +1664,7 @@
           <p:nvPr/>
         </p:nvPicPr>
         <p:blipFill rotWithShape="1">
-          <a:blip xmlns:r="http://schemas.openxmlformats.org/officeDocument/2006/relationships" xmlns:a="http://schemas.openxmlformats.org/drawingml/2006/main" r:embed="R9e393c9fedd04c85">
+          <a:blip xmlns:r="http://schemas.openxmlformats.org/officeDocument/2006/relationships" xmlns:a="http://schemas.openxmlformats.org/drawingml/2006/main" r:embed="Rfb3defa941cb4e0a">
             <a:alphaModFix amt="28000"/>
           </a:blip>
           <a:stretch xmlns:a="http://schemas.openxmlformats.org/drawingml/2006/main"/>
@@ -1899,7 +1899,7 @@
           <p:nvPr/>
         </p:nvPicPr>
         <p:blipFill rotWithShape="1">
-          <a:blip xmlns:r="http://schemas.openxmlformats.org/officeDocument/2006/relationships" xmlns:a="http://schemas.openxmlformats.org/drawingml/2006/main" r:embed="R75dbecaac4314fa3">
+          <a:blip xmlns:r="http://schemas.openxmlformats.org/officeDocument/2006/relationships" xmlns:a="http://schemas.openxmlformats.org/drawingml/2006/main" r:embed="Rd55b88bea9b14fb5">
             <a:alphaModFix amt="28000"/>
           </a:blip>
           <a:stretch xmlns:a="http://schemas.openxmlformats.org/drawingml/2006/main"/>
@@ -2176,7 +2176,7 @@
           <p:nvPr/>
         </p:nvPicPr>
         <p:blipFill rotWithShape="1">
-          <a:blip xmlns:r="http://schemas.openxmlformats.org/officeDocument/2006/relationships" xmlns:a="http://schemas.openxmlformats.org/drawingml/2006/main" r:embed="Re59d7f477e294720">
+          <a:blip xmlns:r="http://schemas.openxmlformats.org/officeDocument/2006/relationships" xmlns:a="http://schemas.openxmlformats.org/drawingml/2006/main" r:embed="R0bcb285e7cb84173">
             <a:alphaModFix amt="28000"/>
           </a:blip>
           <a:stretch xmlns:a="http://schemas.openxmlformats.org/drawingml/2006/main"/>
@@ -2451,7 +2451,7 @@
           <p:nvPr/>
         </p:nvPicPr>
         <p:blipFill rotWithShape="1">
-          <a:blip xmlns:r="http://schemas.openxmlformats.org/officeDocument/2006/relationships" xmlns:a="http://schemas.openxmlformats.org/drawingml/2006/main" r:embed="R3cf7818d54344de0">
+          <a:blip xmlns:r="http://schemas.openxmlformats.org/officeDocument/2006/relationships" xmlns:a="http://schemas.openxmlformats.org/drawingml/2006/main" r:embed="Rc26c8ea69a96470b">
             <a:alphaModFix amt="28000"/>
           </a:blip>
           <a:stretch xmlns:a="http://schemas.openxmlformats.org/drawingml/2006/main"/>
@@ -2875,7 +2875,7 @@
           <p:nvPr/>
         </p:nvPicPr>
         <p:blipFill rotWithShape="1">
-          <a:blip xmlns:r="http://schemas.openxmlformats.org/officeDocument/2006/relationships" xmlns:a="http://schemas.openxmlformats.org/drawingml/2006/main" r:embed="R839e1eaec5cc4612">
+          <a:blip xmlns:r="http://schemas.openxmlformats.org/officeDocument/2006/relationships" xmlns:a="http://schemas.openxmlformats.org/drawingml/2006/main" r:embed="R36621b900d014c3e">
             <a:alphaModFix amt="28000"/>
           </a:blip>
           <a:stretch xmlns:a="http://schemas.openxmlformats.org/drawingml/2006/main"/>
@@ -3016,7 +3016,7 @@
           <p:nvPr/>
         </p:nvPicPr>
         <p:blipFill rotWithShape="1">
-          <a:blip xmlns:r="http://schemas.openxmlformats.org/officeDocument/2006/relationships" xmlns:a="http://schemas.openxmlformats.org/drawingml/2006/main" r:embed="R7f53dda33f2f4c72">
+          <a:blip xmlns:r="http://schemas.openxmlformats.org/officeDocument/2006/relationships" xmlns:a="http://schemas.openxmlformats.org/drawingml/2006/main" r:embed="R296e8a327a554282">
             <a:alphaModFix amt="28000"/>
           </a:blip>
           <a:stretch xmlns:a="http://schemas.openxmlformats.org/drawingml/2006/main"/>
@@ -3130,7 +3130,7 @@
           <p:nvPr/>
         </p:nvPicPr>
         <p:blipFill rotWithShape="1">
-          <a:blip xmlns:r="http://schemas.openxmlformats.org/officeDocument/2006/relationships" xmlns:a="http://schemas.openxmlformats.org/drawingml/2006/main" r:embed="Rdf33a3542875499b">
+          <a:blip xmlns:r="http://schemas.openxmlformats.org/officeDocument/2006/relationships" xmlns:a="http://schemas.openxmlformats.org/drawingml/2006/main" r:embed="Raffdebdca8ad49d8">
             <a:alphaModFix amt="28000"/>
           </a:blip>
           <a:stretch xmlns:a="http://schemas.openxmlformats.org/drawingml/2006/main"/>
@@ -3457,7 +3457,7 @@
           <p:nvPr/>
         </p:nvPicPr>
         <p:blipFill rotWithShape="1">
-          <a:blip xmlns:r="http://schemas.openxmlformats.org/officeDocument/2006/relationships" xmlns:a="http://schemas.openxmlformats.org/drawingml/2006/main" r:embed="R73729cbe3e5e4d64">
+          <a:blip xmlns:r="http://schemas.openxmlformats.org/officeDocument/2006/relationships" xmlns:a="http://schemas.openxmlformats.org/drawingml/2006/main" r:embed="Rd5ddaf0b0fd94073">
             <a:alphaModFix amt="28000"/>
           </a:blip>
           <a:stretch xmlns:a="http://schemas.openxmlformats.org/drawingml/2006/main"/>
@@ -3745,7 +3745,7 @@
           <p:nvPr/>
         </p:nvPicPr>
         <p:blipFill rotWithShape="1">
-          <a:blip xmlns:r="http://schemas.openxmlformats.org/officeDocument/2006/relationships" xmlns:a="http://schemas.openxmlformats.org/drawingml/2006/main" r:embed="R5a1b4478cdc24e11">
+          <a:blip xmlns:r="http://schemas.openxmlformats.org/officeDocument/2006/relationships" xmlns:a="http://schemas.openxmlformats.org/drawingml/2006/main" r:embed="R91a5409477804948">
             <a:alphaModFix amt="28000"/>
           </a:blip>
           <a:stretch xmlns:a="http://schemas.openxmlformats.org/drawingml/2006/main"/>
@@ -3982,17 +3982,17 @@
   </p:cSld>
   <p:clrMap bg1="lt1" tx1="dk1" bg2="lt2" tx2="dk2" accent1="accent1" accent2="accent2" accent3="accent3" accent4="accent4" accent5="accent5" accent6="accent6" hlink="hlink" folHlink="folHlink"/>
   <p:sldLayoutIdLst>
-    <p:sldLayoutId xmlns:r="http://schemas.openxmlformats.org/officeDocument/2006/relationships" id="2147483649" r:id="R9ba4e25cb3114ce0"/>
-    <p:sldLayoutId xmlns:r="http://schemas.openxmlformats.org/officeDocument/2006/relationships" id="2147483650" r:id="Rab52be1ee50a476c"/>
-    <p:sldLayoutId xmlns:r="http://schemas.openxmlformats.org/officeDocument/2006/relationships" id="2147483651" r:id="Rf4e8743b3a824237"/>
-    <p:sldLayoutId xmlns:r="http://schemas.openxmlformats.org/officeDocument/2006/relationships" id="2147483652" r:id="R325b8f9ab8964745"/>
-    <p:sldLayoutId xmlns:r="http://schemas.openxmlformats.org/officeDocument/2006/relationships" id="2147483653" r:id="Rc80427e0356940e1"/>
-    <p:sldLayoutId xmlns:r="http://schemas.openxmlformats.org/officeDocument/2006/relationships" id="2147483654" r:id="Raff72ad1f3744284"/>
-    <p:sldLayoutId xmlns:r="http://schemas.openxmlformats.org/officeDocument/2006/relationships" id="2147483655" r:id="R1472fbb9496c41c0"/>
-    <p:sldLayoutId xmlns:r="http://schemas.openxmlformats.org/officeDocument/2006/relationships" id="2147483656" r:id="R87f580d7c9fc4c4b"/>
-    <p:sldLayoutId xmlns:r="http://schemas.openxmlformats.org/officeDocument/2006/relationships" id="2147483657" r:id="Rd77e39dc4f164230"/>
-    <p:sldLayoutId xmlns:r="http://schemas.openxmlformats.org/officeDocument/2006/relationships" id="2147483658" r:id="R8aa00a34e1604d57"/>
-    <p:sldLayoutId xmlns:r="http://schemas.openxmlformats.org/officeDocument/2006/relationships" id="2147483659" r:id="R0c3e46779b6d4420"/>
+    <p:sldLayoutId xmlns:r="http://schemas.openxmlformats.org/officeDocument/2006/relationships" id="2147483649" r:id="R75b5f7a3ce3b45ad"/>
+    <p:sldLayoutId xmlns:r="http://schemas.openxmlformats.org/officeDocument/2006/relationships" id="2147483650" r:id="Ra05b1ee94f7c48cb"/>
+    <p:sldLayoutId xmlns:r="http://schemas.openxmlformats.org/officeDocument/2006/relationships" id="2147483651" r:id="R944b09beee6a45e6"/>
+    <p:sldLayoutId xmlns:r="http://schemas.openxmlformats.org/officeDocument/2006/relationships" id="2147483652" r:id="Rbd7f090b836b466f"/>
+    <p:sldLayoutId xmlns:r="http://schemas.openxmlformats.org/officeDocument/2006/relationships" id="2147483653" r:id="R5175fed7bc1741e3"/>
+    <p:sldLayoutId xmlns:r="http://schemas.openxmlformats.org/officeDocument/2006/relationships" id="2147483654" r:id="Rcbe41e69de234100"/>
+    <p:sldLayoutId xmlns:r="http://schemas.openxmlformats.org/officeDocument/2006/relationships" id="2147483655" r:id="R6e618f0750804fda"/>
+    <p:sldLayoutId xmlns:r="http://schemas.openxmlformats.org/officeDocument/2006/relationships" id="2147483656" r:id="R49e0cfaac4e44bda"/>
+    <p:sldLayoutId xmlns:r="http://schemas.openxmlformats.org/officeDocument/2006/relationships" id="2147483657" r:id="R1b825376d66641a2"/>
+    <p:sldLayoutId xmlns:r="http://schemas.openxmlformats.org/officeDocument/2006/relationships" id="2147483658" r:id="Rc2cd19440f8a4826"/>
+    <p:sldLayoutId xmlns:r="http://schemas.openxmlformats.org/officeDocument/2006/relationships" id="2147483659" r:id="Rcf00972a56b1421e"/>
   </p:sldLayoutIdLst>
   <p:hf hdr="0" ftr="0" dt="0"/>
   <p:txStyles>

--- a/Mapped Curriculum Lessons/Grade 7/Lesson 21 - Character Codes/Character Codes - Slides.pptx
+++ b/Mapped Curriculum Lessons/Grade 7/Lesson 21 - Character Codes/Character Codes - Slides.pptx
@@ -2,28 +2,28 @@
 <file path=ppt/presentation.xml><?xml version="1.0" encoding="utf-8"?>
 <p:presentation xmlns:p="http://schemas.openxmlformats.org/presentationml/2006/main" embedTrueTypeFonts="1" saveSubsetFonts="0">
   <p:sldMasterIdLst>
-    <p:sldMasterId xmlns:r="http://schemas.openxmlformats.org/officeDocument/2006/relationships" id="2147483648" r:id="R54a15b30b13a4ab0"/>
+    <p:sldMasterId xmlns:r="http://schemas.openxmlformats.org/officeDocument/2006/relationships" id="2147483648" r:id="R1c1b586e4fa4412a"/>
   </p:sldMasterIdLst>
   <p:notesMasterIdLst>
-    <p:notesMasterId xmlns:r="http://schemas.openxmlformats.org/officeDocument/2006/relationships" r:id="R35de08002b374793"/>
+    <p:notesMasterId xmlns:r="http://schemas.openxmlformats.org/officeDocument/2006/relationships" r:id="R7293524b8fc34521"/>
   </p:notesMasterIdLst>
   <p:sldIdLst>
-    <p:sldId xmlns:r="http://schemas.openxmlformats.org/officeDocument/2006/relationships" id="256" r:id="R7c2713ce76304ff1"/>
-    <p:sldId xmlns:r="http://schemas.openxmlformats.org/officeDocument/2006/relationships" id="257" r:id="R4a591440d18b4069"/>
-    <p:sldId xmlns:r="http://schemas.openxmlformats.org/officeDocument/2006/relationships" id="258" r:id="R092579f1122d4633"/>
-    <p:sldId xmlns:r="http://schemas.openxmlformats.org/officeDocument/2006/relationships" id="259" r:id="Rb4ec6ef7b29b4753"/>
-    <p:sldId xmlns:r="http://schemas.openxmlformats.org/officeDocument/2006/relationships" id="260" r:id="Rb8fe7b4907744781"/>
-    <p:sldId xmlns:r="http://schemas.openxmlformats.org/officeDocument/2006/relationships" id="261" r:id="R1f81d3de950e40f5"/>
-    <p:sldId xmlns:r="http://schemas.openxmlformats.org/officeDocument/2006/relationships" id="262" r:id="Rdec5dcc9b9874753"/>
-    <p:sldId xmlns:r="http://schemas.openxmlformats.org/officeDocument/2006/relationships" id="263" r:id="Rd68e6ad0ceb3462d"/>
-    <p:sldId xmlns:r="http://schemas.openxmlformats.org/officeDocument/2006/relationships" id="264" r:id="R2df1421780a94540"/>
+    <p:sldId xmlns:r="http://schemas.openxmlformats.org/officeDocument/2006/relationships" id="256" r:id="R5c104d36e04a407a"/>
+    <p:sldId xmlns:r="http://schemas.openxmlformats.org/officeDocument/2006/relationships" id="257" r:id="R7bb4595d966d4531"/>
+    <p:sldId xmlns:r="http://schemas.openxmlformats.org/officeDocument/2006/relationships" id="258" r:id="R8b4d1680deca45bc"/>
+    <p:sldId xmlns:r="http://schemas.openxmlformats.org/officeDocument/2006/relationships" id="259" r:id="R7db2fb03418d4213"/>
+    <p:sldId xmlns:r="http://schemas.openxmlformats.org/officeDocument/2006/relationships" id="260" r:id="R93d52559aec54833"/>
+    <p:sldId xmlns:r="http://schemas.openxmlformats.org/officeDocument/2006/relationships" id="261" r:id="R423f073e65f641ec"/>
+    <p:sldId xmlns:r="http://schemas.openxmlformats.org/officeDocument/2006/relationships" id="262" r:id="R998192f4feb24631"/>
+    <p:sldId xmlns:r="http://schemas.openxmlformats.org/officeDocument/2006/relationships" id="263" r:id="Rc721b9bb3ce64ad9"/>
+    <p:sldId xmlns:r="http://schemas.openxmlformats.org/officeDocument/2006/relationships" id="264" r:id="R499fdc1a4acd4b1a"/>
   </p:sldIdLst>
   <p:sldSz cx="12192000" cy="6858000"/>
   <p:notesSz cx="6858000" cy="9144000"/>
   <p:embeddedFontLst>
     <p:embeddedFont>
       <p:font typeface="JetBrains Mono"/>
-      <p:regular xmlns:r="http://schemas.openxmlformats.org/officeDocument/2006/relationships" r:id="Rbf4f517095d94679"/>
+      <p:regular xmlns:r="http://schemas.openxmlformats.org/officeDocument/2006/relationships" r:id="R72c793c41d604ace"/>
     </p:embeddedFont>
   </p:embeddedFontLst>
 </p:presentation>
@@ -1071,7 +1071,7 @@
           <p:nvPr/>
         </p:nvPicPr>
         <p:blipFill rotWithShape="1">
-          <a:blip xmlns:r="http://schemas.openxmlformats.org/officeDocument/2006/relationships" xmlns:a="http://schemas.openxmlformats.org/drawingml/2006/main" r:embed="R529def1b1d3341b4"/>
+          <a:blip xmlns:r="http://schemas.openxmlformats.org/officeDocument/2006/relationships" xmlns:a="http://schemas.openxmlformats.org/drawingml/2006/main" r:embed="R4107066355cd43e8"/>
           <a:stretch xmlns:a="http://schemas.openxmlformats.org/drawingml/2006/main"/>
         </p:blipFill>
         <p:spPr>
@@ -1451,7 +1451,7 @@
           <p:nvPr/>
         </p:nvPicPr>
         <p:blipFill rotWithShape="1">
-          <a:blip xmlns:r="http://schemas.openxmlformats.org/officeDocument/2006/relationships" xmlns:a="http://schemas.openxmlformats.org/drawingml/2006/main" r:embed="Re38ffa72e1d84d08">
+          <a:blip xmlns:r="http://schemas.openxmlformats.org/officeDocument/2006/relationships" xmlns:a="http://schemas.openxmlformats.org/drawingml/2006/main" r:embed="Rd0f03d1d3c9e46ca">
             <a:alphaModFix amt="28000"/>
           </a:blip>
           <a:stretch xmlns:a="http://schemas.openxmlformats.org/drawingml/2006/main"/>
@@ -1664,7 +1664,7 @@
           <p:nvPr/>
         </p:nvPicPr>
         <p:blipFill rotWithShape="1">
-          <a:blip xmlns:r="http://schemas.openxmlformats.org/officeDocument/2006/relationships" xmlns:a="http://schemas.openxmlformats.org/drawingml/2006/main" r:embed="Rfb3defa941cb4e0a">
+          <a:blip xmlns:r="http://schemas.openxmlformats.org/officeDocument/2006/relationships" xmlns:a="http://schemas.openxmlformats.org/drawingml/2006/main" r:embed="R911a911bd3754068">
             <a:alphaModFix amt="28000"/>
           </a:blip>
           <a:stretch xmlns:a="http://schemas.openxmlformats.org/drawingml/2006/main"/>
@@ -1899,7 +1899,7 @@
           <p:nvPr/>
         </p:nvPicPr>
         <p:blipFill rotWithShape="1">
-          <a:blip xmlns:r="http://schemas.openxmlformats.org/officeDocument/2006/relationships" xmlns:a="http://schemas.openxmlformats.org/drawingml/2006/main" r:embed="Rd55b88bea9b14fb5">
+          <a:blip xmlns:r="http://schemas.openxmlformats.org/officeDocument/2006/relationships" xmlns:a="http://schemas.openxmlformats.org/drawingml/2006/main" r:embed="R46610ed5430c4cdc">
             <a:alphaModFix amt="28000"/>
           </a:blip>
           <a:stretch xmlns:a="http://schemas.openxmlformats.org/drawingml/2006/main"/>
@@ -2176,7 +2176,7 @@
           <p:nvPr/>
         </p:nvPicPr>
         <p:blipFill rotWithShape="1">
-          <a:blip xmlns:r="http://schemas.openxmlformats.org/officeDocument/2006/relationships" xmlns:a="http://schemas.openxmlformats.org/drawingml/2006/main" r:embed="R0bcb285e7cb84173">
+          <a:blip xmlns:r="http://schemas.openxmlformats.org/officeDocument/2006/relationships" xmlns:a="http://schemas.openxmlformats.org/drawingml/2006/main" r:embed="Rd4d4d0f226b345f3">
             <a:alphaModFix amt="28000"/>
           </a:blip>
           <a:stretch xmlns:a="http://schemas.openxmlformats.org/drawingml/2006/main"/>
@@ -2451,7 +2451,7 @@
           <p:nvPr/>
         </p:nvPicPr>
         <p:blipFill rotWithShape="1">
-          <a:blip xmlns:r="http://schemas.openxmlformats.org/officeDocument/2006/relationships" xmlns:a="http://schemas.openxmlformats.org/drawingml/2006/main" r:embed="Rc26c8ea69a96470b">
+          <a:blip xmlns:r="http://schemas.openxmlformats.org/officeDocument/2006/relationships" xmlns:a="http://schemas.openxmlformats.org/drawingml/2006/main" r:embed="R4b6f0ce8459d4ea3">
             <a:alphaModFix amt="28000"/>
           </a:blip>
           <a:stretch xmlns:a="http://schemas.openxmlformats.org/drawingml/2006/main"/>
@@ -2875,7 +2875,7 @@
           <p:nvPr/>
         </p:nvPicPr>
         <p:blipFill rotWithShape="1">
-          <a:blip xmlns:r="http://schemas.openxmlformats.org/officeDocument/2006/relationships" xmlns:a="http://schemas.openxmlformats.org/drawingml/2006/main" r:embed="R36621b900d014c3e">
+          <a:blip xmlns:r="http://schemas.openxmlformats.org/officeDocument/2006/relationships" xmlns:a="http://schemas.openxmlformats.org/drawingml/2006/main" r:embed="Rfc2e5242f4c040b8">
             <a:alphaModFix amt="28000"/>
           </a:blip>
           <a:stretch xmlns:a="http://schemas.openxmlformats.org/drawingml/2006/main"/>
@@ -3016,7 +3016,7 @@
           <p:nvPr/>
         </p:nvPicPr>
         <p:blipFill rotWithShape="1">
-          <a:blip xmlns:r="http://schemas.openxmlformats.org/officeDocument/2006/relationships" xmlns:a="http://schemas.openxmlformats.org/drawingml/2006/main" r:embed="R296e8a327a554282">
+          <a:blip xmlns:r="http://schemas.openxmlformats.org/officeDocument/2006/relationships" xmlns:a="http://schemas.openxmlformats.org/drawingml/2006/main" r:embed="Ra6a723ccd4904048">
             <a:alphaModFix amt="28000"/>
           </a:blip>
           <a:stretch xmlns:a="http://schemas.openxmlformats.org/drawingml/2006/main"/>
@@ -3130,7 +3130,7 @@
           <p:nvPr/>
         </p:nvPicPr>
         <p:blipFill rotWithShape="1">
-          <a:blip xmlns:r="http://schemas.openxmlformats.org/officeDocument/2006/relationships" xmlns:a="http://schemas.openxmlformats.org/drawingml/2006/main" r:embed="Raffdebdca8ad49d8">
+          <a:blip xmlns:r="http://schemas.openxmlformats.org/officeDocument/2006/relationships" xmlns:a="http://schemas.openxmlformats.org/drawingml/2006/main" r:embed="R652ac8025ea74fdb">
             <a:alphaModFix amt="28000"/>
           </a:blip>
           <a:stretch xmlns:a="http://schemas.openxmlformats.org/drawingml/2006/main"/>
@@ -3457,7 +3457,7 @@
           <p:nvPr/>
         </p:nvPicPr>
         <p:blipFill rotWithShape="1">
-          <a:blip xmlns:r="http://schemas.openxmlformats.org/officeDocument/2006/relationships" xmlns:a="http://schemas.openxmlformats.org/drawingml/2006/main" r:embed="Rd5ddaf0b0fd94073">
+          <a:blip xmlns:r="http://schemas.openxmlformats.org/officeDocument/2006/relationships" xmlns:a="http://schemas.openxmlformats.org/drawingml/2006/main" r:embed="Rf65a856dc93f4a4c">
             <a:alphaModFix amt="28000"/>
           </a:blip>
           <a:stretch xmlns:a="http://schemas.openxmlformats.org/drawingml/2006/main"/>
@@ -3745,7 +3745,7 @@
           <p:nvPr/>
         </p:nvPicPr>
         <p:blipFill rotWithShape="1">
-          <a:blip xmlns:r="http://schemas.openxmlformats.org/officeDocument/2006/relationships" xmlns:a="http://schemas.openxmlformats.org/drawingml/2006/main" r:embed="R91a5409477804948">
+          <a:blip xmlns:r="http://schemas.openxmlformats.org/officeDocument/2006/relationships" xmlns:a="http://schemas.openxmlformats.org/drawingml/2006/main" r:embed="R6918353919794168">
             <a:alphaModFix amt="28000"/>
           </a:blip>
           <a:stretch xmlns:a="http://schemas.openxmlformats.org/drawingml/2006/main"/>
@@ -3982,17 +3982,17 @@
   </p:cSld>
   <p:clrMap bg1="lt1" tx1="dk1" bg2="lt2" tx2="dk2" accent1="accent1" accent2="accent2" accent3="accent3" accent4="accent4" accent5="accent5" accent6="accent6" hlink="hlink" folHlink="folHlink"/>
   <p:sldLayoutIdLst>
-    <p:sldLayoutId xmlns:r="http://schemas.openxmlformats.org/officeDocument/2006/relationships" id="2147483649" r:id="R75b5f7a3ce3b45ad"/>
-    <p:sldLayoutId xmlns:r="http://schemas.openxmlformats.org/officeDocument/2006/relationships" id="2147483650" r:id="Ra05b1ee94f7c48cb"/>
-    <p:sldLayoutId xmlns:r="http://schemas.openxmlformats.org/officeDocument/2006/relationships" id="2147483651" r:id="R944b09beee6a45e6"/>
-    <p:sldLayoutId xmlns:r="http://schemas.openxmlformats.org/officeDocument/2006/relationships" id="2147483652" r:id="Rbd7f090b836b466f"/>
-    <p:sldLayoutId xmlns:r="http://schemas.openxmlformats.org/officeDocument/2006/relationships" id="2147483653" r:id="R5175fed7bc1741e3"/>
-    <p:sldLayoutId xmlns:r="http://schemas.openxmlformats.org/officeDocument/2006/relationships" id="2147483654" r:id="Rcbe41e69de234100"/>
-    <p:sldLayoutId xmlns:r="http://schemas.openxmlformats.org/officeDocument/2006/relationships" id="2147483655" r:id="R6e618f0750804fda"/>
-    <p:sldLayoutId xmlns:r="http://schemas.openxmlformats.org/officeDocument/2006/relationships" id="2147483656" r:id="R49e0cfaac4e44bda"/>
-    <p:sldLayoutId xmlns:r="http://schemas.openxmlformats.org/officeDocument/2006/relationships" id="2147483657" r:id="R1b825376d66641a2"/>
-    <p:sldLayoutId xmlns:r="http://schemas.openxmlformats.org/officeDocument/2006/relationships" id="2147483658" r:id="Rc2cd19440f8a4826"/>
-    <p:sldLayoutId xmlns:r="http://schemas.openxmlformats.org/officeDocument/2006/relationships" id="2147483659" r:id="Rcf00972a56b1421e"/>
+    <p:sldLayoutId xmlns:r="http://schemas.openxmlformats.org/officeDocument/2006/relationships" id="2147483649" r:id="R625adb08ab9b4f4e"/>
+    <p:sldLayoutId xmlns:r="http://schemas.openxmlformats.org/officeDocument/2006/relationships" id="2147483650" r:id="Rde850214454e43a5"/>
+    <p:sldLayoutId xmlns:r="http://schemas.openxmlformats.org/officeDocument/2006/relationships" id="2147483651" r:id="Ra7602cfbe2a64ce8"/>
+    <p:sldLayoutId xmlns:r="http://schemas.openxmlformats.org/officeDocument/2006/relationships" id="2147483652" r:id="R420eaf8105f74aa7"/>
+    <p:sldLayoutId xmlns:r="http://schemas.openxmlformats.org/officeDocument/2006/relationships" id="2147483653" r:id="R02b42b49bdea448e"/>
+    <p:sldLayoutId xmlns:r="http://schemas.openxmlformats.org/officeDocument/2006/relationships" id="2147483654" r:id="R9b90498232434667"/>
+    <p:sldLayoutId xmlns:r="http://schemas.openxmlformats.org/officeDocument/2006/relationships" id="2147483655" r:id="R2e7a38419c7b4d3c"/>
+    <p:sldLayoutId xmlns:r="http://schemas.openxmlformats.org/officeDocument/2006/relationships" id="2147483656" r:id="R67057925da1345b4"/>
+    <p:sldLayoutId xmlns:r="http://schemas.openxmlformats.org/officeDocument/2006/relationships" id="2147483657" r:id="R6241d2e4d808452f"/>
+    <p:sldLayoutId xmlns:r="http://schemas.openxmlformats.org/officeDocument/2006/relationships" id="2147483658" r:id="Re8502691812541d2"/>
+    <p:sldLayoutId xmlns:r="http://schemas.openxmlformats.org/officeDocument/2006/relationships" id="2147483659" r:id="Refdcf49e59d04bd5"/>
   </p:sldLayoutIdLst>
   <p:hf hdr="0" ftr="0" dt="0"/>
   <p:txStyles>

--- a/Mapped Curriculum Lessons/Grade 7/Lesson 21 - Character Codes/Character Codes - Slides.pptx
+++ b/Mapped Curriculum Lessons/Grade 7/Lesson 21 - Character Codes/Character Codes - Slides.pptx
@@ -2,28 +2,28 @@
 <file path=ppt/presentation.xml><?xml version="1.0" encoding="utf-8"?>
 <p:presentation xmlns:p="http://schemas.openxmlformats.org/presentationml/2006/main" embedTrueTypeFonts="1" saveSubsetFonts="0">
   <p:sldMasterIdLst>
-    <p:sldMasterId xmlns:r="http://schemas.openxmlformats.org/officeDocument/2006/relationships" id="2147483648" r:id="R1c1b586e4fa4412a"/>
+    <p:sldMasterId xmlns:r="http://schemas.openxmlformats.org/officeDocument/2006/relationships" id="2147483648" r:id="R180f44b696a7464e"/>
   </p:sldMasterIdLst>
   <p:notesMasterIdLst>
-    <p:notesMasterId xmlns:r="http://schemas.openxmlformats.org/officeDocument/2006/relationships" r:id="R7293524b8fc34521"/>
+    <p:notesMasterId xmlns:r="http://schemas.openxmlformats.org/officeDocument/2006/relationships" r:id="Rd0548178e51148c7"/>
   </p:notesMasterIdLst>
   <p:sldIdLst>
-    <p:sldId xmlns:r="http://schemas.openxmlformats.org/officeDocument/2006/relationships" id="256" r:id="R5c104d36e04a407a"/>
-    <p:sldId xmlns:r="http://schemas.openxmlformats.org/officeDocument/2006/relationships" id="257" r:id="R7bb4595d966d4531"/>
-    <p:sldId xmlns:r="http://schemas.openxmlformats.org/officeDocument/2006/relationships" id="258" r:id="R8b4d1680deca45bc"/>
-    <p:sldId xmlns:r="http://schemas.openxmlformats.org/officeDocument/2006/relationships" id="259" r:id="R7db2fb03418d4213"/>
-    <p:sldId xmlns:r="http://schemas.openxmlformats.org/officeDocument/2006/relationships" id="260" r:id="R93d52559aec54833"/>
-    <p:sldId xmlns:r="http://schemas.openxmlformats.org/officeDocument/2006/relationships" id="261" r:id="R423f073e65f641ec"/>
-    <p:sldId xmlns:r="http://schemas.openxmlformats.org/officeDocument/2006/relationships" id="262" r:id="R998192f4feb24631"/>
-    <p:sldId xmlns:r="http://schemas.openxmlformats.org/officeDocument/2006/relationships" id="263" r:id="Rc721b9bb3ce64ad9"/>
-    <p:sldId xmlns:r="http://schemas.openxmlformats.org/officeDocument/2006/relationships" id="264" r:id="R499fdc1a4acd4b1a"/>
+    <p:sldId xmlns:r="http://schemas.openxmlformats.org/officeDocument/2006/relationships" id="256" r:id="R2ecc8340606d4707"/>
+    <p:sldId xmlns:r="http://schemas.openxmlformats.org/officeDocument/2006/relationships" id="257" r:id="Rb1a9fda7ab6e4749"/>
+    <p:sldId xmlns:r="http://schemas.openxmlformats.org/officeDocument/2006/relationships" id="258" r:id="Red60c0ac84674276"/>
+    <p:sldId xmlns:r="http://schemas.openxmlformats.org/officeDocument/2006/relationships" id="259" r:id="R4bcd397bc3604aa5"/>
+    <p:sldId xmlns:r="http://schemas.openxmlformats.org/officeDocument/2006/relationships" id="260" r:id="Rff056e3dc8ca47d0"/>
+    <p:sldId xmlns:r="http://schemas.openxmlformats.org/officeDocument/2006/relationships" id="261" r:id="Rfccc0c2d2a164ee7"/>
+    <p:sldId xmlns:r="http://schemas.openxmlformats.org/officeDocument/2006/relationships" id="262" r:id="Rb3d6f232cffe4f59"/>
+    <p:sldId xmlns:r="http://schemas.openxmlformats.org/officeDocument/2006/relationships" id="263" r:id="Rbf8a4e81203141d1"/>
+    <p:sldId xmlns:r="http://schemas.openxmlformats.org/officeDocument/2006/relationships" id="264" r:id="R246b16bdb04e403c"/>
   </p:sldIdLst>
   <p:sldSz cx="12192000" cy="6858000"/>
   <p:notesSz cx="6858000" cy="9144000"/>
   <p:embeddedFontLst>
     <p:embeddedFont>
       <p:font typeface="JetBrains Mono"/>
-      <p:regular xmlns:r="http://schemas.openxmlformats.org/officeDocument/2006/relationships" r:id="R72c793c41d604ace"/>
+      <p:regular xmlns:r="http://schemas.openxmlformats.org/officeDocument/2006/relationships" r:id="R3110e7741475422d"/>
     </p:embeddedFont>
   </p:embeddedFontLst>
 </p:presentation>
@@ -1071,7 +1071,7 @@
           <p:nvPr/>
         </p:nvPicPr>
         <p:blipFill rotWithShape="1">
-          <a:blip xmlns:r="http://schemas.openxmlformats.org/officeDocument/2006/relationships" xmlns:a="http://schemas.openxmlformats.org/drawingml/2006/main" r:embed="R4107066355cd43e8"/>
+          <a:blip xmlns:r="http://schemas.openxmlformats.org/officeDocument/2006/relationships" xmlns:a="http://schemas.openxmlformats.org/drawingml/2006/main" r:embed="R3af012afb44641f1"/>
           <a:stretch xmlns:a="http://schemas.openxmlformats.org/drawingml/2006/main"/>
         </p:blipFill>
         <p:spPr>
@@ -1451,7 +1451,7 @@
           <p:nvPr/>
         </p:nvPicPr>
         <p:blipFill rotWithShape="1">
-          <a:blip xmlns:r="http://schemas.openxmlformats.org/officeDocument/2006/relationships" xmlns:a="http://schemas.openxmlformats.org/drawingml/2006/main" r:embed="Rd0f03d1d3c9e46ca">
+          <a:blip xmlns:r="http://schemas.openxmlformats.org/officeDocument/2006/relationships" xmlns:a="http://schemas.openxmlformats.org/drawingml/2006/main" r:embed="R6e899d6be5c54db4">
             <a:alphaModFix amt="28000"/>
           </a:blip>
           <a:stretch xmlns:a="http://schemas.openxmlformats.org/drawingml/2006/main"/>
@@ -1664,7 +1664,7 @@
           <p:nvPr/>
         </p:nvPicPr>
         <p:blipFill rotWithShape="1">
-          <a:blip xmlns:r="http://schemas.openxmlformats.org/officeDocument/2006/relationships" xmlns:a="http://schemas.openxmlformats.org/drawingml/2006/main" r:embed="R911a911bd3754068">
+          <a:blip xmlns:r="http://schemas.openxmlformats.org/officeDocument/2006/relationships" xmlns:a="http://schemas.openxmlformats.org/drawingml/2006/main" r:embed="R1235eb8db787400f">
             <a:alphaModFix amt="28000"/>
           </a:blip>
           <a:stretch xmlns:a="http://schemas.openxmlformats.org/drawingml/2006/main"/>
@@ -1899,7 +1899,7 @@
           <p:nvPr/>
         </p:nvPicPr>
         <p:blipFill rotWithShape="1">
-          <a:blip xmlns:r="http://schemas.openxmlformats.org/officeDocument/2006/relationships" xmlns:a="http://schemas.openxmlformats.org/drawingml/2006/main" r:embed="R46610ed5430c4cdc">
+          <a:blip xmlns:r="http://schemas.openxmlformats.org/officeDocument/2006/relationships" xmlns:a="http://schemas.openxmlformats.org/drawingml/2006/main" r:embed="R72bd682e8b3e4c69">
             <a:alphaModFix amt="28000"/>
           </a:blip>
           <a:stretch xmlns:a="http://schemas.openxmlformats.org/drawingml/2006/main"/>
@@ -2176,7 +2176,7 @@
           <p:nvPr/>
         </p:nvPicPr>
         <p:blipFill rotWithShape="1">
-          <a:blip xmlns:r="http://schemas.openxmlformats.org/officeDocument/2006/relationships" xmlns:a="http://schemas.openxmlformats.org/drawingml/2006/main" r:embed="Rd4d4d0f226b345f3">
+          <a:blip xmlns:r="http://schemas.openxmlformats.org/officeDocument/2006/relationships" xmlns:a="http://schemas.openxmlformats.org/drawingml/2006/main" r:embed="Racb9b4a2a5184fcc">
             <a:alphaModFix amt="28000"/>
           </a:blip>
           <a:stretch xmlns:a="http://schemas.openxmlformats.org/drawingml/2006/main"/>
@@ -2451,7 +2451,7 @@
           <p:nvPr/>
         </p:nvPicPr>
         <p:blipFill rotWithShape="1">
-          <a:blip xmlns:r="http://schemas.openxmlformats.org/officeDocument/2006/relationships" xmlns:a="http://schemas.openxmlformats.org/drawingml/2006/main" r:embed="R4b6f0ce8459d4ea3">
+          <a:blip xmlns:r="http://schemas.openxmlformats.org/officeDocument/2006/relationships" xmlns:a="http://schemas.openxmlformats.org/drawingml/2006/main" r:embed="Rc479ec0db3aa477a">
             <a:alphaModFix amt="28000"/>
           </a:blip>
           <a:stretch xmlns:a="http://schemas.openxmlformats.org/drawingml/2006/main"/>
@@ -2875,7 +2875,7 @@
           <p:nvPr/>
         </p:nvPicPr>
         <p:blipFill rotWithShape="1">
-          <a:blip xmlns:r="http://schemas.openxmlformats.org/officeDocument/2006/relationships" xmlns:a="http://schemas.openxmlformats.org/drawingml/2006/main" r:embed="Rfc2e5242f4c040b8">
+          <a:blip xmlns:r="http://schemas.openxmlformats.org/officeDocument/2006/relationships" xmlns:a="http://schemas.openxmlformats.org/drawingml/2006/main" r:embed="Rcf1b7cdb66f64221">
             <a:alphaModFix amt="28000"/>
           </a:blip>
           <a:stretch xmlns:a="http://schemas.openxmlformats.org/drawingml/2006/main"/>
@@ -3016,7 +3016,7 @@
           <p:nvPr/>
         </p:nvPicPr>
         <p:blipFill rotWithShape="1">
-          <a:blip xmlns:r="http://schemas.openxmlformats.org/officeDocument/2006/relationships" xmlns:a="http://schemas.openxmlformats.org/drawingml/2006/main" r:embed="Ra6a723ccd4904048">
+          <a:blip xmlns:r="http://schemas.openxmlformats.org/officeDocument/2006/relationships" xmlns:a="http://schemas.openxmlformats.org/drawingml/2006/main" r:embed="R9c239853e22b4b23">
             <a:alphaModFix amt="28000"/>
           </a:blip>
           <a:stretch xmlns:a="http://schemas.openxmlformats.org/drawingml/2006/main"/>
@@ -3130,7 +3130,7 @@
           <p:nvPr/>
         </p:nvPicPr>
         <p:blipFill rotWithShape="1">
-          <a:blip xmlns:r="http://schemas.openxmlformats.org/officeDocument/2006/relationships" xmlns:a="http://schemas.openxmlformats.org/drawingml/2006/main" r:embed="R652ac8025ea74fdb">
+          <a:blip xmlns:r="http://schemas.openxmlformats.org/officeDocument/2006/relationships" xmlns:a="http://schemas.openxmlformats.org/drawingml/2006/main" r:embed="R1fd4a9ef2bc04c52">
             <a:alphaModFix amt="28000"/>
           </a:blip>
           <a:stretch xmlns:a="http://schemas.openxmlformats.org/drawingml/2006/main"/>
@@ -3457,7 +3457,7 @@
           <p:nvPr/>
         </p:nvPicPr>
         <p:blipFill rotWithShape="1">
-          <a:blip xmlns:r="http://schemas.openxmlformats.org/officeDocument/2006/relationships" xmlns:a="http://schemas.openxmlformats.org/drawingml/2006/main" r:embed="Rf65a856dc93f4a4c">
+          <a:blip xmlns:r="http://schemas.openxmlformats.org/officeDocument/2006/relationships" xmlns:a="http://schemas.openxmlformats.org/drawingml/2006/main" r:embed="Rb63626020d41456f">
             <a:alphaModFix amt="28000"/>
           </a:blip>
           <a:stretch xmlns:a="http://schemas.openxmlformats.org/drawingml/2006/main"/>
@@ -3745,7 +3745,7 @@
           <p:nvPr/>
         </p:nvPicPr>
         <p:blipFill rotWithShape="1">
-          <a:blip xmlns:r="http://schemas.openxmlformats.org/officeDocument/2006/relationships" xmlns:a="http://schemas.openxmlformats.org/drawingml/2006/main" r:embed="R6918353919794168">
+          <a:blip xmlns:r="http://schemas.openxmlformats.org/officeDocument/2006/relationships" xmlns:a="http://schemas.openxmlformats.org/drawingml/2006/main" r:embed="Ra42bb8229c974825">
             <a:alphaModFix amt="28000"/>
           </a:blip>
           <a:stretch xmlns:a="http://schemas.openxmlformats.org/drawingml/2006/main"/>
@@ -3982,17 +3982,17 @@
   </p:cSld>
   <p:clrMap bg1="lt1" tx1="dk1" bg2="lt2" tx2="dk2" accent1="accent1" accent2="accent2" accent3="accent3" accent4="accent4" accent5="accent5" accent6="accent6" hlink="hlink" folHlink="folHlink"/>
   <p:sldLayoutIdLst>
-    <p:sldLayoutId xmlns:r="http://schemas.openxmlformats.org/officeDocument/2006/relationships" id="2147483649" r:id="R625adb08ab9b4f4e"/>
-    <p:sldLayoutId xmlns:r="http://schemas.openxmlformats.org/officeDocument/2006/relationships" id="2147483650" r:id="Rde850214454e43a5"/>
-    <p:sldLayoutId xmlns:r="http://schemas.openxmlformats.org/officeDocument/2006/relationships" id="2147483651" r:id="Ra7602cfbe2a64ce8"/>
-    <p:sldLayoutId xmlns:r="http://schemas.openxmlformats.org/officeDocument/2006/relationships" id="2147483652" r:id="R420eaf8105f74aa7"/>
-    <p:sldLayoutId xmlns:r="http://schemas.openxmlformats.org/officeDocument/2006/relationships" id="2147483653" r:id="R02b42b49bdea448e"/>
-    <p:sldLayoutId xmlns:r="http://schemas.openxmlformats.org/officeDocument/2006/relationships" id="2147483654" r:id="R9b90498232434667"/>
-    <p:sldLayoutId xmlns:r="http://schemas.openxmlformats.org/officeDocument/2006/relationships" id="2147483655" r:id="R2e7a38419c7b4d3c"/>
-    <p:sldLayoutId xmlns:r="http://schemas.openxmlformats.org/officeDocument/2006/relationships" id="2147483656" r:id="R67057925da1345b4"/>
-    <p:sldLayoutId xmlns:r="http://schemas.openxmlformats.org/officeDocument/2006/relationships" id="2147483657" r:id="R6241d2e4d808452f"/>
-    <p:sldLayoutId xmlns:r="http://schemas.openxmlformats.org/officeDocument/2006/relationships" id="2147483658" r:id="Re8502691812541d2"/>
-    <p:sldLayoutId xmlns:r="http://schemas.openxmlformats.org/officeDocument/2006/relationships" id="2147483659" r:id="Refdcf49e59d04bd5"/>
+    <p:sldLayoutId xmlns:r="http://schemas.openxmlformats.org/officeDocument/2006/relationships" id="2147483649" r:id="R38e66ea18c2b42f2"/>
+    <p:sldLayoutId xmlns:r="http://schemas.openxmlformats.org/officeDocument/2006/relationships" id="2147483650" r:id="Rb8451a3d4245442f"/>
+    <p:sldLayoutId xmlns:r="http://schemas.openxmlformats.org/officeDocument/2006/relationships" id="2147483651" r:id="R633a24810cda4bbf"/>
+    <p:sldLayoutId xmlns:r="http://schemas.openxmlformats.org/officeDocument/2006/relationships" id="2147483652" r:id="R243386801d67474c"/>
+    <p:sldLayoutId xmlns:r="http://schemas.openxmlformats.org/officeDocument/2006/relationships" id="2147483653" r:id="R59f84b0f6d28473e"/>
+    <p:sldLayoutId xmlns:r="http://schemas.openxmlformats.org/officeDocument/2006/relationships" id="2147483654" r:id="R2af7fcd0880b4ebb"/>
+    <p:sldLayoutId xmlns:r="http://schemas.openxmlformats.org/officeDocument/2006/relationships" id="2147483655" r:id="R905b455f86884ad7"/>
+    <p:sldLayoutId xmlns:r="http://schemas.openxmlformats.org/officeDocument/2006/relationships" id="2147483656" r:id="R29874d61fc604795"/>
+    <p:sldLayoutId xmlns:r="http://schemas.openxmlformats.org/officeDocument/2006/relationships" id="2147483657" r:id="R28e216da9b0845b2"/>
+    <p:sldLayoutId xmlns:r="http://schemas.openxmlformats.org/officeDocument/2006/relationships" id="2147483658" r:id="R301a43f7070f4819"/>
+    <p:sldLayoutId xmlns:r="http://schemas.openxmlformats.org/officeDocument/2006/relationships" id="2147483659" r:id="R192d56a433614436"/>
   </p:sldLayoutIdLst>
   <p:hf hdr="0" ftr="0" dt="0"/>
   <p:txStyles>
